--- a/耶和華行了大事(崇拜版).pptx
+++ b/耶和華行了大事(崇拜版).pptx
@@ -5,11 +5,16 @@
     <p:sldMasterId id="2147483660" r:id="rId1"/>
   </p:sldMasterIdLst>
   <p:sldIdLst>
-    <p:sldId id="256" r:id="rId2"/>
-    <p:sldId id="257" r:id="rId3"/>
-    <p:sldId id="258" r:id="rId4"/>
-    <p:sldId id="259" r:id="rId5"/>
-    <p:sldId id="260" r:id="rId6"/>
+    <p:sldId id="596" r:id="rId2"/>
+    <p:sldId id="597" r:id="rId3"/>
+    <p:sldId id="598" r:id="rId4"/>
+    <p:sldId id="599" r:id="rId5"/>
+    <p:sldId id="600" r:id="rId6"/>
+    <p:sldId id="601" r:id="rId7"/>
+    <p:sldId id="602" r:id="rId8"/>
+    <p:sldId id="603" r:id="rId9"/>
+    <p:sldId id="604" r:id="rId10"/>
+    <p:sldId id="605" r:id="rId11"/>
   </p:sldIdLst>
   <p:sldSz cx="12192000" cy="6858000"/>
   <p:notesSz cx="6858000" cy="9144000"/>
@@ -165,10 +170,9 @@
           <a:lstStyle/>
           <a:p>
             <a:r>
-              <a:rPr lang="zh-TW" altLang="en-US" smtClean="0"/>
+              <a:rPr lang="zh-TW" altLang="en-US"/>
               <a:t>按一下以編輯母片標題樣式</a:t>
             </a:r>
-            <a:endParaRPr lang="zh-TW" altLang="en-US"/>
           </a:p>
         </p:txBody>
       </p:sp>
@@ -284,10 +288,9 @@
           </a:lstStyle>
           <a:p>
             <a:r>
-              <a:rPr lang="zh-TW" altLang="en-US" smtClean="0"/>
+              <a:rPr lang="zh-TW" altLang="en-US"/>
               <a:t>按一下以編輯母片副標題樣式</a:t>
             </a:r>
-            <a:endParaRPr lang="zh-TW" altLang="en-US"/>
           </a:p>
         </p:txBody>
       </p:sp>
@@ -308,7 +311,7 @@
           <a:p>
             <a:fld id="{E78D9EF6-0FD0-4D2A-8E16-51EA57A3A903}" type="datetimeFigureOut">
               <a:rPr lang="zh-TW" altLang="en-US" smtClean="0"/>
-              <a:t>2019/12/14</a:t>
+              <a:t>2024/6/15</a:t>
             </a:fld>
             <a:endParaRPr lang="zh-TW" altLang="en-US"/>
           </a:p>
@@ -397,10 +400,9 @@
           <a:lstStyle/>
           <a:p>
             <a:r>
-              <a:rPr lang="zh-TW" altLang="en-US" smtClean="0"/>
+              <a:rPr lang="zh-TW" altLang="en-US"/>
               <a:t>按一下以編輯母片標題樣式</a:t>
             </a:r>
-            <a:endParaRPr lang="zh-TW" altLang="en-US"/>
           </a:p>
         </p:txBody>
       </p:sp>
@@ -421,38 +423,37 @@
           <a:p>
             <a:pPr lvl="0"/>
             <a:r>
-              <a:rPr lang="zh-TW" altLang="en-US" smtClean="0"/>
+              <a:rPr lang="zh-TW" altLang="en-US"/>
               <a:t>按一下以編輯母片文字樣式</a:t>
             </a:r>
           </a:p>
           <a:p>
             <a:pPr lvl="1"/>
             <a:r>
-              <a:rPr lang="zh-TW" altLang="en-US" smtClean="0"/>
+              <a:rPr lang="zh-TW" altLang="en-US"/>
               <a:t>第二層</a:t>
             </a:r>
           </a:p>
           <a:p>
             <a:pPr lvl="2"/>
             <a:r>
-              <a:rPr lang="zh-TW" altLang="en-US" smtClean="0"/>
+              <a:rPr lang="zh-TW" altLang="en-US"/>
               <a:t>第三層</a:t>
             </a:r>
           </a:p>
           <a:p>
             <a:pPr lvl="3"/>
             <a:r>
-              <a:rPr lang="zh-TW" altLang="en-US" smtClean="0"/>
+              <a:rPr lang="zh-TW" altLang="en-US"/>
               <a:t>第四層</a:t>
             </a:r>
           </a:p>
           <a:p>
             <a:pPr lvl="4"/>
             <a:r>
-              <a:rPr lang="zh-TW" altLang="en-US" smtClean="0"/>
+              <a:rPr lang="zh-TW" altLang="en-US"/>
               <a:t>第五層</a:t>
             </a:r>
-            <a:endParaRPr lang="zh-TW" altLang="en-US"/>
           </a:p>
         </p:txBody>
       </p:sp>
@@ -473,7 +474,7 @@
           <a:p>
             <a:fld id="{E78D9EF6-0FD0-4D2A-8E16-51EA57A3A903}" type="datetimeFigureOut">
               <a:rPr lang="zh-TW" altLang="en-US" smtClean="0"/>
-              <a:t>2019/12/14</a:t>
+              <a:t>2024/6/15</a:t>
             </a:fld>
             <a:endParaRPr lang="zh-TW" altLang="en-US"/>
           </a:p>
@@ -567,10 +568,9 @@
           <a:lstStyle/>
           <a:p>
             <a:r>
-              <a:rPr lang="zh-TW" altLang="en-US" smtClean="0"/>
+              <a:rPr lang="zh-TW" altLang="en-US"/>
               <a:t>按一下以編輯母片標題樣式</a:t>
             </a:r>
-            <a:endParaRPr lang="zh-TW" altLang="en-US"/>
           </a:p>
         </p:txBody>
       </p:sp>
@@ -596,38 +596,37 @@
           <a:p>
             <a:pPr lvl="0"/>
             <a:r>
-              <a:rPr lang="zh-TW" altLang="en-US" smtClean="0"/>
+              <a:rPr lang="zh-TW" altLang="en-US"/>
               <a:t>按一下以編輯母片文字樣式</a:t>
             </a:r>
           </a:p>
           <a:p>
             <a:pPr lvl="1"/>
             <a:r>
-              <a:rPr lang="zh-TW" altLang="en-US" smtClean="0"/>
+              <a:rPr lang="zh-TW" altLang="en-US"/>
               <a:t>第二層</a:t>
             </a:r>
           </a:p>
           <a:p>
             <a:pPr lvl="2"/>
             <a:r>
-              <a:rPr lang="zh-TW" altLang="en-US" smtClean="0"/>
+              <a:rPr lang="zh-TW" altLang="en-US"/>
               <a:t>第三層</a:t>
             </a:r>
           </a:p>
           <a:p>
             <a:pPr lvl="3"/>
             <a:r>
-              <a:rPr lang="zh-TW" altLang="en-US" smtClean="0"/>
+              <a:rPr lang="zh-TW" altLang="en-US"/>
               <a:t>第四層</a:t>
             </a:r>
           </a:p>
           <a:p>
             <a:pPr lvl="4"/>
             <a:r>
-              <a:rPr lang="zh-TW" altLang="en-US" smtClean="0"/>
+              <a:rPr lang="zh-TW" altLang="en-US"/>
               <a:t>第五層</a:t>
             </a:r>
-            <a:endParaRPr lang="zh-TW" altLang="en-US"/>
           </a:p>
         </p:txBody>
       </p:sp>
@@ -648,7 +647,7 @@
           <a:p>
             <a:fld id="{E78D9EF6-0FD0-4D2A-8E16-51EA57A3A903}" type="datetimeFigureOut">
               <a:rPr lang="zh-TW" altLang="en-US" smtClean="0"/>
-              <a:t>2019/12/14</a:t>
+              <a:t>2024/6/15</a:t>
             </a:fld>
             <a:endParaRPr lang="zh-TW" altLang="en-US"/>
           </a:p>
@@ -737,10 +736,9 @@
           <a:lstStyle/>
           <a:p>
             <a:r>
-              <a:rPr lang="zh-TW" altLang="en-US" smtClean="0"/>
+              <a:rPr lang="zh-TW" altLang="en-US"/>
               <a:t>按一下以編輯母片標題樣式</a:t>
             </a:r>
-            <a:endParaRPr lang="zh-TW" altLang="en-US"/>
           </a:p>
         </p:txBody>
       </p:sp>
@@ -761,38 +759,37 @@
           <a:p>
             <a:pPr lvl="0"/>
             <a:r>
-              <a:rPr lang="zh-TW" altLang="en-US" smtClean="0"/>
+              <a:rPr lang="zh-TW" altLang="en-US"/>
               <a:t>按一下以編輯母片文字樣式</a:t>
             </a:r>
           </a:p>
           <a:p>
             <a:pPr lvl="1"/>
             <a:r>
-              <a:rPr lang="zh-TW" altLang="en-US" smtClean="0"/>
+              <a:rPr lang="zh-TW" altLang="en-US"/>
               <a:t>第二層</a:t>
             </a:r>
           </a:p>
           <a:p>
             <a:pPr lvl="2"/>
             <a:r>
-              <a:rPr lang="zh-TW" altLang="en-US" smtClean="0"/>
+              <a:rPr lang="zh-TW" altLang="en-US"/>
               <a:t>第三層</a:t>
             </a:r>
           </a:p>
           <a:p>
             <a:pPr lvl="3"/>
             <a:r>
-              <a:rPr lang="zh-TW" altLang="en-US" smtClean="0"/>
+              <a:rPr lang="zh-TW" altLang="en-US"/>
               <a:t>第四層</a:t>
             </a:r>
           </a:p>
           <a:p>
             <a:pPr lvl="4"/>
             <a:r>
-              <a:rPr lang="zh-TW" altLang="en-US" smtClean="0"/>
+              <a:rPr lang="zh-TW" altLang="en-US"/>
               <a:t>第五層</a:t>
             </a:r>
-            <a:endParaRPr lang="zh-TW" altLang="en-US"/>
           </a:p>
         </p:txBody>
       </p:sp>
@@ -813,7 +810,7 @@
           <a:p>
             <a:fld id="{E78D9EF6-0FD0-4D2A-8E16-51EA57A3A903}" type="datetimeFigureOut">
               <a:rPr lang="zh-TW" altLang="en-US" smtClean="0"/>
-              <a:t>2019/12/14</a:t>
+              <a:t>2024/6/15</a:t>
             </a:fld>
             <a:endParaRPr lang="zh-TW" altLang="en-US"/>
           </a:p>
@@ -911,10 +908,9 @@
           </a:lstStyle>
           <a:p>
             <a:r>
-              <a:rPr lang="zh-TW" altLang="en-US" smtClean="0"/>
+              <a:rPr lang="zh-TW" altLang="en-US"/>
               <a:t>按一下以編輯母片標題樣式</a:t>
             </a:r>
-            <a:endParaRPr lang="zh-TW" altLang="en-US"/>
           </a:p>
         </p:txBody>
       </p:sp>
@@ -1031,7 +1027,7 @@
           <a:p>
             <a:pPr lvl="0"/>
             <a:r>
-              <a:rPr lang="zh-TW" altLang="en-US" smtClean="0"/>
+              <a:rPr lang="zh-TW" altLang="en-US"/>
               <a:t>按一下以編輯母片文字樣式</a:t>
             </a:r>
           </a:p>
@@ -1054,7 +1050,7 @@
           <a:p>
             <a:fld id="{E78D9EF6-0FD0-4D2A-8E16-51EA57A3A903}" type="datetimeFigureOut">
               <a:rPr lang="zh-TW" altLang="en-US" smtClean="0"/>
-              <a:t>2019/12/14</a:t>
+              <a:t>2024/6/15</a:t>
             </a:fld>
             <a:endParaRPr lang="zh-TW" altLang="en-US"/>
           </a:p>
@@ -1143,10 +1139,9 @@
           <a:lstStyle/>
           <a:p>
             <a:r>
-              <a:rPr lang="zh-TW" altLang="en-US" smtClean="0"/>
+              <a:rPr lang="zh-TW" altLang="en-US"/>
               <a:t>按一下以編輯母片標題樣式</a:t>
             </a:r>
-            <a:endParaRPr lang="zh-TW" altLang="en-US"/>
           </a:p>
         </p:txBody>
       </p:sp>
@@ -1200,38 +1195,37 @@
           <a:p>
             <a:pPr lvl="0"/>
             <a:r>
-              <a:rPr lang="zh-TW" altLang="en-US" smtClean="0"/>
+              <a:rPr lang="zh-TW" altLang="en-US"/>
               <a:t>按一下以編輯母片文字樣式</a:t>
             </a:r>
           </a:p>
           <a:p>
             <a:pPr lvl="1"/>
             <a:r>
-              <a:rPr lang="zh-TW" altLang="en-US" smtClean="0"/>
+              <a:rPr lang="zh-TW" altLang="en-US"/>
               <a:t>第二層</a:t>
             </a:r>
           </a:p>
           <a:p>
             <a:pPr lvl="2"/>
             <a:r>
-              <a:rPr lang="zh-TW" altLang="en-US" smtClean="0"/>
+              <a:rPr lang="zh-TW" altLang="en-US"/>
               <a:t>第三層</a:t>
             </a:r>
           </a:p>
           <a:p>
             <a:pPr lvl="3"/>
             <a:r>
-              <a:rPr lang="zh-TW" altLang="en-US" smtClean="0"/>
+              <a:rPr lang="zh-TW" altLang="en-US"/>
               <a:t>第四層</a:t>
             </a:r>
           </a:p>
           <a:p>
             <a:pPr lvl="4"/>
             <a:r>
-              <a:rPr lang="zh-TW" altLang="en-US" smtClean="0"/>
+              <a:rPr lang="zh-TW" altLang="en-US"/>
               <a:t>第五層</a:t>
             </a:r>
-            <a:endParaRPr lang="zh-TW" altLang="en-US"/>
           </a:p>
         </p:txBody>
       </p:sp>
@@ -1285,38 +1279,37 @@
           <a:p>
             <a:pPr lvl="0"/>
             <a:r>
-              <a:rPr lang="zh-TW" altLang="en-US" smtClean="0"/>
+              <a:rPr lang="zh-TW" altLang="en-US"/>
               <a:t>按一下以編輯母片文字樣式</a:t>
             </a:r>
           </a:p>
           <a:p>
             <a:pPr lvl="1"/>
             <a:r>
-              <a:rPr lang="zh-TW" altLang="en-US" smtClean="0"/>
+              <a:rPr lang="zh-TW" altLang="en-US"/>
               <a:t>第二層</a:t>
             </a:r>
           </a:p>
           <a:p>
             <a:pPr lvl="2"/>
             <a:r>
-              <a:rPr lang="zh-TW" altLang="en-US" smtClean="0"/>
+              <a:rPr lang="zh-TW" altLang="en-US"/>
               <a:t>第三層</a:t>
             </a:r>
           </a:p>
           <a:p>
             <a:pPr lvl="3"/>
             <a:r>
-              <a:rPr lang="zh-TW" altLang="en-US" smtClean="0"/>
+              <a:rPr lang="zh-TW" altLang="en-US"/>
               <a:t>第四層</a:t>
             </a:r>
           </a:p>
           <a:p>
             <a:pPr lvl="4"/>
             <a:r>
-              <a:rPr lang="zh-TW" altLang="en-US" smtClean="0"/>
+              <a:rPr lang="zh-TW" altLang="en-US"/>
               <a:t>第五層</a:t>
             </a:r>
-            <a:endParaRPr lang="zh-TW" altLang="en-US"/>
           </a:p>
         </p:txBody>
       </p:sp>
@@ -1337,7 +1330,7 @@
           <a:p>
             <a:fld id="{E78D9EF6-0FD0-4D2A-8E16-51EA57A3A903}" type="datetimeFigureOut">
               <a:rPr lang="zh-TW" altLang="en-US" smtClean="0"/>
-              <a:t>2019/12/14</a:t>
+              <a:t>2024/6/15</a:t>
             </a:fld>
             <a:endParaRPr lang="zh-TW" altLang="en-US"/>
           </a:p>
@@ -1430,10 +1423,9 @@
           </a:lstStyle>
           <a:p>
             <a:r>
-              <a:rPr lang="zh-TW" altLang="en-US" smtClean="0"/>
+              <a:rPr lang="zh-TW" altLang="en-US"/>
               <a:t>按一下以編輯母片標題樣式</a:t>
             </a:r>
-            <a:endParaRPr lang="zh-TW" altLang="en-US"/>
           </a:p>
         </p:txBody>
       </p:sp>
@@ -1496,7 +1488,7 @@
           <a:p>
             <a:pPr lvl="0"/>
             <a:r>
-              <a:rPr lang="zh-TW" altLang="en-US" smtClean="0"/>
+              <a:rPr lang="zh-TW" altLang="en-US"/>
               <a:t>按一下以編輯母片文字樣式</a:t>
             </a:r>
           </a:p>
@@ -1552,38 +1544,37 @@
           <a:p>
             <a:pPr lvl="0"/>
             <a:r>
-              <a:rPr lang="zh-TW" altLang="en-US" smtClean="0"/>
+              <a:rPr lang="zh-TW" altLang="en-US"/>
               <a:t>按一下以編輯母片文字樣式</a:t>
             </a:r>
           </a:p>
           <a:p>
             <a:pPr lvl="1"/>
             <a:r>
-              <a:rPr lang="zh-TW" altLang="en-US" smtClean="0"/>
+              <a:rPr lang="zh-TW" altLang="en-US"/>
               <a:t>第二層</a:t>
             </a:r>
           </a:p>
           <a:p>
             <a:pPr lvl="2"/>
             <a:r>
-              <a:rPr lang="zh-TW" altLang="en-US" smtClean="0"/>
+              <a:rPr lang="zh-TW" altLang="en-US"/>
               <a:t>第三層</a:t>
             </a:r>
           </a:p>
           <a:p>
             <a:pPr lvl="3"/>
             <a:r>
-              <a:rPr lang="zh-TW" altLang="en-US" smtClean="0"/>
+              <a:rPr lang="zh-TW" altLang="en-US"/>
               <a:t>第四層</a:t>
             </a:r>
           </a:p>
           <a:p>
             <a:pPr lvl="4"/>
             <a:r>
-              <a:rPr lang="zh-TW" altLang="en-US" smtClean="0"/>
+              <a:rPr lang="zh-TW" altLang="en-US"/>
               <a:t>第五層</a:t>
             </a:r>
-            <a:endParaRPr lang="zh-TW" altLang="en-US"/>
           </a:p>
         </p:txBody>
       </p:sp>
@@ -1646,7 +1637,7 @@
           <a:p>
             <a:pPr lvl="0"/>
             <a:r>
-              <a:rPr lang="zh-TW" altLang="en-US" smtClean="0"/>
+              <a:rPr lang="zh-TW" altLang="en-US"/>
               <a:t>按一下以編輯母片文字樣式</a:t>
             </a:r>
           </a:p>
@@ -1702,38 +1693,37 @@
           <a:p>
             <a:pPr lvl="0"/>
             <a:r>
-              <a:rPr lang="zh-TW" altLang="en-US" smtClean="0"/>
+              <a:rPr lang="zh-TW" altLang="en-US"/>
               <a:t>按一下以編輯母片文字樣式</a:t>
             </a:r>
           </a:p>
           <a:p>
             <a:pPr lvl="1"/>
             <a:r>
-              <a:rPr lang="zh-TW" altLang="en-US" smtClean="0"/>
+              <a:rPr lang="zh-TW" altLang="en-US"/>
               <a:t>第二層</a:t>
             </a:r>
           </a:p>
           <a:p>
             <a:pPr lvl="2"/>
             <a:r>
-              <a:rPr lang="zh-TW" altLang="en-US" smtClean="0"/>
+              <a:rPr lang="zh-TW" altLang="en-US"/>
               <a:t>第三層</a:t>
             </a:r>
           </a:p>
           <a:p>
             <a:pPr lvl="3"/>
             <a:r>
-              <a:rPr lang="zh-TW" altLang="en-US" smtClean="0"/>
+              <a:rPr lang="zh-TW" altLang="en-US"/>
               <a:t>第四層</a:t>
             </a:r>
           </a:p>
           <a:p>
             <a:pPr lvl="4"/>
             <a:r>
-              <a:rPr lang="zh-TW" altLang="en-US" smtClean="0"/>
+              <a:rPr lang="zh-TW" altLang="en-US"/>
               <a:t>第五層</a:t>
             </a:r>
-            <a:endParaRPr lang="zh-TW" altLang="en-US"/>
           </a:p>
         </p:txBody>
       </p:sp>
@@ -1754,7 +1744,7 @@
           <a:p>
             <a:fld id="{E78D9EF6-0FD0-4D2A-8E16-51EA57A3A903}" type="datetimeFigureOut">
               <a:rPr lang="zh-TW" altLang="en-US" smtClean="0"/>
-              <a:t>2019/12/14</a:t>
+              <a:t>2024/6/15</a:t>
             </a:fld>
             <a:endParaRPr lang="zh-TW" altLang="en-US"/>
           </a:p>
@@ -1843,10 +1833,9 @@
           <a:lstStyle/>
           <a:p>
             <a:r>
-              <a:rPr lang="zh-TW" altLang="en-US" smtClean="0"/>
+              <a:rPr lang="zh-TW" altLang="en-US"/>
               <a:t>按一下以編輯母片標題樣式</a:t>
             </a:r>
-            <a:endParaRPr lang="zh-TW" altLang="en-US"/>
           </a:p>
         </p:txBody>
       </p:sp>
@@ -1867,7 +1856,7 @@
           <a:p>
             <a:fld id="{E78D9EF6-0FD0-4D2A-8E16-51EA57A3A903}" type="datetimeFigureOut">
               <a:rPr lang="zh-TW" altLang="en-US" smtClean="0"/>
-              <a:t>2019/12/14</a:t>
+              <a:t>2024/6/15</a:t>
             </a:fld>
             <a:endParaRPr lang="zh-TW" altLang="en-US"/>
           </a:p>
@@ -1957,7 +1946,7 @@
           <a:p>
             <a:fld id="{E78D9EF6-0FD0-4D2A-8E16-51EA57A3A903}" type="datetimeFigureOut">
               <a:rPr lang="zh-TW" altLang="en-US" smtClean="0"/>
-              <a:t>2019/12/14</a:t>
+              <a:t>2024/6/15</a:t>
             </a:fld>
             <a:endParaRPr lang="zh-TW" altLang="en-US"/>
           </a:p>
@@ -2055,10 +2044,9 @@
           </a:lstStyle>
           <a:p>
             <a:r>
-              <a:rPr lang="zh-TW" altLang="en-US" smtClean="0"/>
+              <a:rPr lang="zh-TW" altLang="en-US"/>
               <a:t>按一下以編輯母片標題樣式</a:t>
             </a:r>
-            <a:endParaRPr lang="zh-TW" altLang="en-US"/>
           </a:p>
         </p:txBody>
       </p:sp>
@@ -2112,38 +2100,37 @@
           <a:p>
             <a:pPr lvl="0"/>
             <a:r>
-              <a:rPr lang="zh-TW" altLang="en-US" smtClean="0"/>
+              <a:rPr lang="zh-TW" altLang="en-US"/>
               <a:t>按一下以編輯母片文字樣式</a:t>
             </a:r>
           </a:p>
           <a:p>
             <a:pPr lvl="1"/>
             <a:r>
-              <a:rPr lang="zh-TW" altLang="en-US" smtClean="0"/>
+              <a:rPr lang="zh-TW" altLang="en-US"/>
               <a:t>第二層</a:t>
             </a:r>
           </a:p>
           <a:p>
             <a:pPr lvl="2"/>
             <a:r>
-              <a:rPr lang="zh-TW" altLang="en-US" smtClean="0"/>
+              <a:rPr lang="zh-TW" altLang="en-US"/>
               <a:t>第三層</a:t>
             </a:r>
           </a:p>
           <a:p>
             <a:pPr lvl="3"/>
             <a:r>
-              <a:rPr lang="zh-TW" altLang="en-US" smtClean="0"/>
+              <a:rPr lang="zh-TW" altLang="en-US"/>
               <a:t>第四層</a:t>
             </a:r>
           </a:p>
           <a:p>
             <a:pPr lvl="4"/>
             <a:r>
-              <a:rPr lang="zh-TW" altLang="en-US" smtClean="0"/>
+              <a:rPr lang="zh-TW" altLang="en-US"/>
               <a:t>第五層</a:t>
             </a:r>
-            <a:endParaRPr lang="zh-TW" altLang="en-US"/>
           </a:p>
         </p:txBody>
       </p:sp>
@@ -2206,7 +2193,7 @@
           <a:p>
             <a:pPr lvl="0"/>
             <a:r>
-              <a:rPr lang="zh-TW" altLang="en-US" smtClean="0"/>
+              <a:rPr lang="zh-TW" altLang="en-US"/>
               <a:t>按一下以編輯母片文字樣式</a:t>
             </a:r>
           </a:p>
@@ -2229,7 +2216,7 @@
           <a:p>
             <a:fld id="{E78D9EF6-0FD0-4D2A-8E16-51EA57A3A903}" type="datetimeFigureOut">
               <a:rPr lang="zh-TW" altLang="en-US" smtClean="0"/>
-              <a:t>2019/12/14</a:t>
+              <a:t>2024/6/15</a:t>
             </a:fld>
             <a:endParaRPr lang="zh-TW" altLang="en-US"/>
           </a:p>
@@ -2327,10 +2314,9 @@
           </a:lstStyle>
           <a:p>
             <a:r>
-              <a:rPr lang="zh-TW" altLang="en-US" smtClean="0"/>
+              <a:rPr lang="zh-TW" altLang="en-US"/>
               <a:t>按一下以編輯母片標題樣式</a:t>
             </a:r>
-            <a:endParaRPr lang="zh-TW" altLang="en-US"/>
           </a:p>
         </p:txBody>
       </p:sp>
@@ -2392,10 +2378,9 @@
           </a:lstStyle>
           <a:p>
             <a:r>
-              <a:rPr lang="zh-TW" altLang="en-US" smtClean="0"/>
+              <a:rPr lang="zh-TW" altLang="en-US"/>
               <a:t>按一下圖示以新增圖片</a:t>
             </a:r>
-            <a:endParaRPr lang="zh-TW" altLang="en-US"/>
           </a:p>
         </p:txBody>
       </p:sp>
@@ -2458,7 +2443,7 @@
           <a:p>
             <a:pPr lvl="0"/>
             <a:r>
-              <a:rPr lang="zh-TW" altLang="en-US" smtClean="0"/>
+              <a:rPr lang="zh-TW" altLang="en-US"/>
               <a:t>按一下以編輯母片文字樣式</a:t>
             </a:r>
           </a:p>
@@ -2481,7 +2466,7 @@
           <a:p>
             <a:fld id="{E78D9EF6-0FD0-4D2A-8E16-51EA57A3A903}" type="datetimeFigureOut">
               <a:rPr lang="zh-TW" altLang="en-US" smtClean="0"/>
-              <a:t>2019/12/14</a:t>
+              <a:t>2024/6/15</a:t>
             </a:fld>
             <a:endParaRPr lang="zh-TW" altLang="en-US"/>
           </a:p>
@@ -2590,10 +2575,9 @@
           <a:lstStyle/>
           <a:p>
             <a:r>
-              <a:rPr lang="zh-TW" altLang="en-US" smtClean="0"/>
+              <a:rPr lang="zh-TW" altLang="en-US"/>
               <a:t>按一下以編輯母片標題樣式</a:t>
             </a:r>
-            <a:endParaRPr lang="zh-TW" altLang="en-US"/>
           </a:p>
         </p:txBody>
       </p:sp>
@@ -2624,38 +2608,37 @@
           <a:p>
             <a:pPr lvl="0"/>
             <a:r>
-              <a:rPr lang="zh-TW" altLang="en-US" smtClean="0"/>
+              <a:rPr lang="zh-TW" altLang="en-US"/>
               <a:t>按一下以編輯母片文字樣式</a:t>
             </a:r>
           </a:p>
           <a:p>
             <a:pPr lvl="1"/>
             <a:r>
-              <a:rPr lang="zh-TW" altLang="en-US" smtClean="0"/>
+              <a:rPr lang="zh-TW" altLang="en-US"/>
               <a:t>第二層</a:t>
             </a:r>
           </a:p>
           <a:p>
             <a:pPr lvl="2"/>
             <a:r>
-              <a:rPr lang="zh-TW" altLang="en-US" smtClean="0"/>
+              <a:rPr lang="zh-TW" altLang="en-US"/>
               <a:t>第三層</a:t>
             </a:r>
           </a:p>
           <a:p>
             <a:pPr lvl="3"/>
             <a:r>
-              <a:rPr lang="zh-TW" altLang="en-US" smtClean="0"/>
+              <a:rPr lang="zh-TW" altLang="en-US"/>
               <a:t>第四層</a:t>
             </a:r>
           </a:p>
           <a:p>
             <a:pPr lvl="4"/>
             <a:r>
-              <a:rPr lang="zh-TW" altLang="en-US" smtClean="0"/>
+              <a:rPr lang="zh-TW" altLang="en-US"/>
               <a:t>第五層</a:t>
             </a:r>
-            <a:endParaRPr lang="zh-TW" altLang="en-US"/>
           </a:p>
         </p:txBody>
       </p:sp>
@@ -2694,7 +2677,7 @@
           <a:p>
             <a:fld id="{E78D9EF6-0FD0-4D2A-8E16-51EA57A3A903}" type="datetimeFigureOut">
               <a:rPr lang="zh-TW" altLang="en-US" smtClean="0"/>
-              <a:t>2019/12/14</a:t>
+              <a:t>2024/6/15</a:t>
             </a:fld>
             <a:endParaRPr lang="zh-TW" altLang="en-US"/>
           </a:p>
@@ -3074,22 +3057,113 @@
             <p:ph type="title"/>
           </p:nvPr>
         </p:nvSpPr>
-        <p:spPr/>
-        <p:txBody>
-          <a:bodyPr/>
-          <a:lstStyle/>
-          <a:p>
-            <a:r>
-              <a:rPr lang="zh-CN" altLang="en-US" b="1" dirty="0" smtClean="0">
-                <a:solidFill>
-                  <a:srgbClr val="000066"/>
-                </a:solidFill>
+        <p:spPr>
+          <a:xfrm>
+            <a:off x="0" y="2660915"/>
+            <a:ext cx="12192000" cy="1143000"/>
+          </a:xfrm>
+        </p:spPr>
+        <p:txBody>
+          <a:bodyPr>
+            <a:noAutofit/>
+          </a:bodyPr>
+          <a:lstStyle/>
+          <a:p>
+            <a:r>
+              <a:rPr lang="zh-CN" altLang="en-US" sz="7200" b="1" i="1" dirty="0">
+                <a:solidFill>
+                  <a:srgbClr val="000066"/>
+                </a:solidFill>
+                <a:effectLst>
+                  <a:outerShdw blurRad="38100" dist="38100" dir="2700000" algn="tl">
+                    <a:srgbClr val="000000">
+                      <a:alpha val="43137"/>
+                    </a:srgbClr>
+                  </a:outerShdw>
+                </a:effectLst>
                 <a:latin typeface="微軟正黑體" pitchFamily="34" charset="-120"/>
                 <a:ea typeface="微軟正黑體" pitchFamily="34" charset="-120"/>
               </a:rPr>
               <a:t>耶和華行了大事</a:t>
             </a:r>
-            <a:endParaRPr lang="zh-TW" altLang="en-US" b="1" dirty="0">
+            <a:endParaRPr lang="zh-TW" altLang="en-US" sz="7200" b="1" i="1" dirty="0">
+              <a:solidFill>
+                <a:srgbClr val="000066"/>
+              </a:solidFill>
+              <a:effectLst>
+                <a:outerShdw blurRad="38100" dist="38100" dir="2700000" algn="tl">
+                  <a:srgbClr val="000000">
+                    <a:alpha val="43137"/>
+                  </a:srgbClr>
+                </a:outerShdw>
+              </a:effectLst>
+              <a:latin typeface="微軟正黑體" pitchFamily="34" charset="-120"/>
+              <a:ea typeface="微軟正黑體" pitchFamily="34" charset="-120"/>
+            </a:endParaRPr>
+          </a:p>
+        </p:txBody>
+      </p:sp>
+    </p:spTree>
+  </p:cSld>
+  <p:clrMapOvr>
+    <a:masterClrMapping/>
+  </p:clrMapOvr>
+</p:sld>
+</file>
+
+<file path=ppt/slides/slide10.xml><?xml version="1.0" encoding="utf-8"?>
+<p:sld xmlns:a="http://schemas.openxmlformats.org/drawingml/2006/main" xmlns:r="http://schemas.openxmlformats.org/officeDocument/2006/relationships" xmlns:p="http://schemas.openxmlformats.org/presentationml/2006/main">
+  <p:cSld>
+    <p:spTree>
+      <p:nvGrpSpPr>
+        <p:cNvPr id="1" name=""/>
+        <p:cNvGrpSpPr/>
+        <p:nvPr/>
+      </p:nvGrpSpPr>
+      <p:grpSpPr>
+        <a:xfrm>
+          <a:off x="0" y="0"/>
+          <a:ext cx="0" cy="0"/>
+          <a:chOff x="0" y="0"/>
+          <a:chExt cx="0" cy="0"/>
+        </a:xfrm>
+      </p:grpSpPr>
+      <p:sp>
+        <p:nvSpPr>
+          <p:cNvPr id="5" name="內容版面配置區 4"/>
+          <p:cNvSpPr>
+            <a:spLocks noGrp="1"/>
+          </p:cNvSpPr>
+          <p:nvPr>
+            <p:ph idx="1"/>
+          </p:nvPr>
+        </p:nvSpPr>
+        <p:spPr>
+          <a:xfrm>
+            <a:off x="0" y="2084851"/>
+            <a:ext cx="12192000" cy="2404863"/>
+          </a:xfrm>
+        </p:spPr>
+        <p:txBody>
+          <a:bodyPr anchor="ctr">
+            <a:normAutofit/>
+          </a:bodyPr>
+          <a:lstStyle/>
+          <a:p>
+            <a:pPr algn="ctr">
+              <a:buNone/>
+            </a:pPr>
+            <a:r>
+              <a:rPr lang="zh-TW" altLang="en-US" sz="6400" b="1" dirty="0">
+                <a:solidFill>
+                  <a:srgbClr val="000066"/>
+                </a:solidFill>
+                <a:latin typeface="微軟正黑體" pitchFamily="34" charset="-120"/>
+                <a:ea typeface="微軟正黑體" pitchFamily="34" charset="-120"/>
+              </a:rPr>
+              <a:t>祂必帶領選民歡呼向前</a:t>
+            </a:r>
+            <a:endParaRPr lang="en-US" altLang="zh-TW" sz="6400" b="1" dirty="0">
               <a:solidFill>
                 <a:srgbClr val="000066"/>
               </a:solidFill>
@@ -3097,135 +3171,121 @@
               <a:ea typeface="微軟正黑體" pitchFamily="34" charset="-120"/>
             </a:endParaRPr>
           </a:p>
-        </p:txBody>
-      </p:sp>
-      <p:sp>
-        <p:nvSpPr>
-          <p:cNvPr id="5" name="內容版面配置區 4"/>
-          <p:cNvSpPr>
-            <a:spLocks noGrp="1"/>
-          </p:cNvSpPr>
-          <p:nvPr>
-            <p:ph idx="1"/>
-          </p:nvPr>
+          <a:p>
+            <a:pPr algn="ctr">
+              <a:buNone/>
+            </a:pPr>
+            <a:r>
+              <a:rPr lang="zh-TW" altLang="en-US" sz="6400" b="1" dirty="0">
+                <a:solidFill>
+                  <a:srgbClr val="000066"/>
+                </a:solidFill>
+                <a:latin typeface="微軟正黑體" pitchFamily="34" charset="-120"/>
+                <a:ea typeface="微軟正黑體" pitchFamily="34" charset="-120"/>
+              </a:rPr>
+              <a:t>祂將列國的地賜給我們</a:t>
+            </a:r>
+          </a:p>
+        </p:txBody>
+      </p:sp>
+      <p:sp>
+        <p:nvSpPr>
+          <p:cNvPr id="3" name="TextBox 2"/>
+          <p:cNvSpPr txBox="1"/>
+          <p:nvPr/>
         </p:nvSpPr>
         <p:spPr>
           <a:xfrm>
-            <a:off x="1524000" y="1600200"/>
-            <a:ext cx="9144000" cy="5257800"/>
+            <a:off x="0" y="5157193"/>
+            <a:ext cx="12192000" cy="584775"/>
           </a:xfrm>
+          <a:prstGeom prst="rect">
+            <a:avLst/>
+          </a:prstGeom>
+          <a:noFill/>
         </p:spPr>
         <p:txBody>
-          <a:bodyPr>
-            <a:normAutofit/>
+          <a:bodyPr wrap="square" rtlCol="0">
+            <a:spAutoFit/>
           </a:bodyPr>
           <a:lstStyle/>
           <a:p>
-            <a:pPr algn="ctr">
-              <a:buNone/>
-            </a:pPr>
-            <a:r>
-              <a:rPr lang="zh-TW" altLang="en-US" sz="5400" b="1" dirty="0">
-                <a:solidFill>
-                  <a:srgbClr val="000066"/>
-                </a:solidFill>
-                <a:latin typeface="微軟正黑體" pitchFamily="34" charset="-120"/>
-                <a:ea typeface="微軟正黑體" pitchFamily="34" charset="-120"/>
-              </a:rPr>
-              <a:t>耶和華已經為我們行了大事</a:t>
-            </a:r>
-            <a:endParaRPr lang="en-US" altLang="zh-TW" sz="5400" b="1" dirty="0">
+            <a:pPr algn="ctr"/>
+            <a:r>
+              <a:rPr lang="en-US" sz="3200" b="1" dirty="0">
+                <a:solidFill>
+                  <a:srgbClr val="000066"/>
+                </a:solidFill>
+                <a:latin typeface="Microsoft JhengHei" panose="020B0604030504040204" pitchFamily="34" charset="-120"/>
+                <a:ea typeface="Microsoft JhengHei" panose="020B0604030504040204" pitchFamily="34" charset="-120"/>
+              </a:rPr>
+              <a:t>( </a:t>
+            </a:r>
+            <a:r>
+              <a:rPr lang="zh-CN" altLang="en-US" sz="3200" b="1" dirty="0">
+                <a:solidFill>
+                  <a:srgbClr val="000066"/>
+                </a:solidFill>
+                <a:latin typeface="Microsoft JhengHei" panose="020B0604030504040204" pitchFamily="34" charset="-120"/>
+                <a:ea typeface="Microsoft JhengHei" panose="020B0604030504040204" pitchFamily="34" charset="-120"/>
+              </a:rPr>
+              <a:t>橋</a:t>
+            </a:r>
+            <a:r>
+              <a:rPr lang="en-US" sz="3200" b="1" dirty="0">
+                <a:solidFill>
+                  <a:srgbClr val="000066"/>
+                </a:solidFill>
+                <a:latin typeface="Microsoft JhengHei" panose="020B0604030504040204" pitchFamily="34" charset="-120"/>
+                <a:ea typeface="Microsoft JhengHei" panose="020B0604030504040204" pitchFamily="34" charset="-120"/>
+              </a:rPr>
+              <a:t> )</a:t>
+            </a:r>
+            <a:r>
+              <a:rPr lang="zh-CN" altLang="en-US" sz="3200" b="1" dirty="0">
+                <a:solidFill>
+                  <a:srgbClr val="000066"/>
+                </a:solidFill>
+                <a:latin typeface="Microsoft JhengHei" panose="020B0604030504040204" pitchFamily="34" charset="-120"/>
+                <a:ea typeface="Microsoft JhengHei" panose="020B0604030504040204" pitchFamily="34" charset="-120"/>
+              </a:rPr>
+              <a:t>（</a:t>
+            </a:r>
+            <a:r>
+              <a:rPr lang="en-US" altLang="zh-CN" sz="3200" b="1" dirty="0">
+                <a:solidFill>
+                  <a:srgbClr val="000066"/>
+                </a:solidFill>
+                <a:latin typeface="Microsoft JhengHei" panose="020B0604030504040204" pitchFamily="34" charset="-120"/>
+                <a:ea typeface="Microsoft JhengHei" panose="020B0604030504040204" pitchFamily="34" charset="-120"/>
+              </a:rPr>
+              <a:t>2</a:t>
+            </a:r>
+            <a:r>
+              <a:rPr lang="zh-CN" altLang="en-US" sz="3200" b="1" dirty="0">
+                <a:solidFill>
+                  <a:srgbClr val="000066"/>
+                </a:solidFill>
+                <a:latin typeface="Microsoft JhengHei" panose="020B0604030504040204" pitchFamily="34" charset="-120"/>
+                <a:ea typeface="Microsoft JhengHei" panose="020B0604030504040204" pitchFamily="34" charset="-120"/>
+              </a:rPr>
+              <a:t>次）</a:t>
+            </a:r>
+            <a:endParaRPr lang="vi-VN" sz="3200" b="1" dirty="0">
               <a:solidFill>
                 <a:srgbClr val="000066"/>
               </a:solidFill>
-              <a:latin typeface="微軟正黑體" pitchFamily="34" charset="-120"/>
-              <a:ea typeface="微軟正黑體" pitchFamily="34" charset="-120"/>
+              <a:ea typeface="Microsoft JhengHei" panose="020B0604030504040204" pitchFamily="34" charset="-120"/>
             </a:endParaRPr>
           </a:p>
-          <a:p>
-            <a:pPr algn="ctr">
-              <a:buNone/>
-            </a:pPr>
-            <a:r>
-              <a:rPr lang="zh-TW" altLang="en-US" sz="5400" b="1" dirty="0">
-                <a:solidFill>
-                  <a:srgbClr val="000066"/>
-                </a:solidFill>
-                <a:latin typeface="微軟正黑體" pitchFamily="34" charset="-120"/>
-                <a:ea typeface="微軟正黑體" pitchFamily="34" charset="-120"/>
-              </a:rPr>
-              <a:t>祂鋪張雲彩當遮蓋</a:t>
-            </a:r>
-            <a:endParaRPr lang="en-US" altLang="zh-TW" sz="5400" b="1" dirty="0">
-              <a:solidFill>
-                <a:srgbClr val="000066"/>
-              </a:solidFill>
-              <a:latin typeface="微軟正黑體" pitchFamily="34" charset="-120"/>
-              <a:ea typeface="微軟正黑體" pitchFamily="34" charset="-120"/>
-            </a:endParaRPr>
-          </a:p>
-          <a:p>
-            <a:pPr algn="ctr">
-              <a:buNone/>
-            </a:pPr>
-            <a:r>
-              <a:rPr lang="zh-TW" altLang="en-US" sz="5400" b="1" dirty="0">
-                <a:solidFill>
-                  <a:srgbClr val="000066"/>
-                </a:solidFill>
-                <a:latin typeface="微軟正黑體" pitchFamily="34" charset="-120"/>
-                <a:ea typeface="微軟正黑體" pitchFamily="34" charset="-120"/>
-              </a:rPr>
-              <a:t>夜間使火光照</a:t>
-            </a:r>
-            <a:endParaRPr lang="en-US" altLang="zh-TW" sz="5400" b="1" dirty="0">
-              <a:solidFill>
-                <a:srgbClr val="000066"/>
-              </a:solidFill>
-              <a:latin typeface="微軟正黑體" pitchFamily="34" charset="-120"/>
-              <a:ea typeface="微軟正黑體" pitchFamily="34" charset="-120"/>
-            </a:endParaRPr>
-          </a:p>
-          <a:p>
-            <a:pPr algn="ctr">
-              <a:buNone/>
-            </a:pPr>
-            <a:r>
-              <a:rPr lang="zh-TW" altLang="en-US" sz="5400" b="1" dirty="0">
-                <a:solidFill>
-                  <a:srgbClr val="000066"/>
-                </a:solidFill>
-                <a:latin typeface="微軟正黑體" pitchFamily="34" charset="-120"/>
-                <a:ea typeface="微軟正黑體" pitchFamily="34" charset="-120"/>
-              </a:rPr>
-              <a:t>耶和華已經為我們行了大事</a:t>
-            </a:r>
-            <a:endParaRPr lang="en-US" altLang="zh-TW" sz="5400" b="1" dirty="0">
-              <a:solidFill>
-                <a:srgbClr val="000066"/>
-              </a:solidFill>
-              <a:latin typeface="微軟正黑體" pitchFamily="34" charset="-120"/>
-              <a:ea typeface="微軟正黑體" pitchFamily="34" charset="-120"/>
-            </a:endParaRPr>
-          </a:p>
-          <a:p>
-            <a:pPr algn="ctr">
-              <a:buNone/>
-            </a:pPr>
-            <a:r>
-              <a:rPr lang="zh-TW" altLang="en-US" sz="5400" b="1" dirty="0">
-                <a:solidFill>
-                  <a:srgbClr val="000066"/>
-                </a:solidFill>
-                <a:latin typeface="微軟正黑體" pitchFamily="34" charset="-120"/>
-                <a:ea typeface="微軟正黑體" pitchFamily="34" charset="-120"/>
-              </a:rPr>
-              <a:t>祂在乾旱之處使水流成河</a:t>
-            </a:r>
-          </a:p>
         </p:txBody>
       </p:sp>
     </p:spTree>
+    <p:extLst>
+      <p:ext uri="{BB962C8B-B14F-4D97-AF65-F5344CB8AC3E}">
+        <p14:creationId xmlns:p14="http://schemas.microsoft.com/office/powerpoint/2010/main" val="1381014024"/>
+      </p:ext>
+    </p:extLst>
   </p:cSld>
   <p:clrMapOvr>
     <a:masterClrMapping/>
@@ -3252,30 +3312,40 @@
       </p:grpSpPr>
       <p:sp>
         <p:nvSpPr>
-          <p:cNvPr id="4" name="標題 3"/>
-          <p:cNvSpPr>
-            <a:spLocks noGrp="1"/>
-          </p:cNvSpPr>
-          <p:nvPr>
-            <p:ph type="title"/>
-          </p:nvPr>
-        </p:nvSpPr>
-        <p:spPr/>
-        <p:txBody>
-          <a:bodyPr/>
-          <a:lstStyle/>
-          <a:p>
-            <a:r>
-              <a:rPr lang="zh-CN" altLang="en-US" b="1" dirty="0" smtClean="0">
+          <p:cNvPr id="5" name="內容版面配置區 4"/>
+          <p:cNvSpPr>
+            <a:spLocks noGrp="1"/>
+          </p:cNvSpPr>
+          <p:nvPr>
+            <p:ph idx="1"/>
+          </p:nvPr>
+        </p:nvSpPr>
+        <p:spPr>
+          <a:xfrm>
+            <a:off x="0" y="2084851"/>
+            <a:ext cx="12192000" cy="2404863"/>
+          </a:xfrm>
+        </p:spPr>
+        <p:txBody>
+          <a:bodyPr anchor="ctr">
+            <a:normAutofit/>
+          </a:bodyPr>
+          <a:lstStyle/>
+          <a:p>
+            <a:pPr algn="ctr">
+              <a:buNone/>
+            </a:pPr>
+            <a:r>
+              <a:rPr lang="zh-TW" altLang="en-US" sz="6400" b="1" dirty="0">
                 <a:solidFill>
                   <a:srgbClr val="000066"/>
                 </a:solidFill>
                 <a:latin typeface="微軟正黑體" pitchFamily="34" charset="-120"/>
                 <a:ea typeface="微軟正黑體" pitchFamily="34" charset="-120"/>
               </a:rPr>
-              <a:t>耶和華行了大事</a:t>
-            </a:r>
-            <a:endParaRPr lang="zh-TW" altLang="en-US" b="1" dirty="0">
+              <a:t>耶和華已經為我們行了大事</a:t>
+            </a:r>
+            <a:endParaRPr lang="en-US" altLang="zh-TW" sz="6400" b="1" dirty="0">
               <a:solidFill>
                 <a:srgbClr val="000066"/>
               </a:solidFill>
@@ -3287,127 +3357,73 @@
       </p:sp>
       <p:sp>
         <p:nvSpPr>
-          <p:cNvPr id="5" name="內容版面配置區 4"/>
-          <p:cNvSpPr>
-            <a:spLocks noGrp="1"/>
-          </p:cNvSpPr>
-          <p:nvPr>
-            <p:ph idx="1"/>
-          </p:nvPr>
+          <p:cNvPr id="3" name="TextBox 2"/>
+          <p:cNvSpPr txBox="1"/>
+          <p:nvPr/>
         </p:nvSpPr>
         <p:spPr>
           <a:xfrm>
-            <a:off x="1524000" y="1600200"/>
-            <a:ext cx="9144000" cy="5257800"/>
+            <a:off x="0" y="5157193"/>
+            <a:ext cx="12192000" cy="584775"/>
           </a:xfrm>
+          <a:prstGeom prst="rect">
+            <a:avLst/>
+          </a:prstGeom>
+          <a:noFill/>
         </p:spPr>
         <p:txBody>
-          <a:bodyPr>
-            <a:normAutofit/>
+          <a:bodyPr wrap="square" rtlCol="0">
+            <a:spAutoFit/>
           </a:bodyPr>
           <a:lstStyle/>
           <a:p>
-            <a:pPr algn="ctr">
-              <a:buNone/>
-            </a:pPr>
-            <a:r>
-              <a:rPr lang="zh-TW" altLang="en-US" sz="5400" b="1" dirty="0">
-                <a:solidFill>
-                  <a:srgbClr val="000066"/>
-                </a:solidFill>
-                <a:latin typeface="微軟正黑體" pitchFamily="34" charset="-120"/>
-                <a:ea typeface="微軟正黑體" pitchFamily="34" charset="-120"/>
-              </a:rPr>
-              <a:t>我們要歡呼  述說祂的作為</a:t>
-            </a:r>
-            <a:endParaRPr lang="en-US" altLang="zh-TW" sz="5400" b="1" dirty="0">
+            <a:pPr algn="ctr"/>
+            <a:r>
+              <a:rPr lang="en-US" sz="3200" b="1" dirty="0">
+                <a:solidFill>
+                  <a:srgbClr val="000066"/>
+                </a:solidFill>
+                <a:latin typeface="Microsoft JhengHei" panose="020B0604030504040204" pitchFamily="34" charset="-120"/>
+                <a:ea typeface="Microsoft JhengHei" panose="020B0604030504040204" pitchFamily="34" charset="-120"/>
+              </a:rPr>
+              <a:t>( </a:t>
+            </a:r>
+            <a:r>
+              <a:rPr lang="zh-CN" altLang="en-US" sz="3200" b="1" dirty="0">
+                <a:solidFill>
+                  <a:srgbClr val="000066"/>
+                </a:solidFill>
+                <a:latin typeface="Microsoft JhengHei" panose="020B0604030504040204" pitchFamily="34" charset="-120"/>
+                <a:ea typeface="Microsoft JhengHei" panose="020B0604030504040204" pitchFamily="34" charset="-120"/>
+              </a:rPr>
+              <a:t>正歌 </a:t>
+            </a:r>
+            <a:r>
+              <a:rPr lang="en-US" altLang="zh-CN" sz="3200" b="1" dirty="0">
+                <a:solidFill>
+                  <a:srgbClr val="000066"/>
+                </a:solidFill>
+                <a:latin typeface="Microsoft JhengHei" panose="020B0604030504040204" pitchFamily="34" charset="-120"/>
+                <a:ea typeface="Microsoft JhengHei" panose="020B0604030504040204" pitchFamily="34" charset="-120"/>
+              </a:rPr>
+              <a:t>1</a:t>
+            </a:r>
+            <a:r>
+              <a:rPr lang="en-US" sz="3200" b="1" dirty="0">
+                <a:solidFill>
+                  <a:srgbClr val="000066"/>
+                </a:solidFill>
+                <a:latin typeface="Microsoft JhengHei" panose="020B0604030504040204" pitchFamily="34" charset="-120"/>
+                <a:ea typeface="Microsoft JhengHei" panose="020B0604030504040204" pitchFamily="34" charset="-120"/>
+              </a:rPr>
+              <a:t> )</a:t>
+            </a:r>
+            <a:endParaRPr lang="vi-VN" sz="3200" b="1" dirty="0">
               <a:solidFill>
                 <a:srgbClr val="000066"/>
               </a:solidFill>
-              <a:latin typeface="微軟正黑體" pitchFamily="34" charset="-120"/>
-              <a:ea typeface="微軟正黑體" pitchFamily="34" charset="-120"/>
+              <a:ea typeface="Microsoft JhengHei" panose="020B0604030504040204" pitchFamily="34" charset="-120"/>
             </a:endParaRPr>
-          </a:p>
-          <a:p>
-            <a:pPr algn="ctr">
-              <a:buNone/>
-            </a:pPr>
-            <a:r>
-              <a:rPr lang="zh-TW" altLang="en-US" sz="5400" b="1" dirty="0">
-                <a:solidFill>
-                  <a:srgbClr val="000066"/>
-                </a:solidFill>
-                <a:latin typeface="微軟正黑體" pitchFamily="34" charset="-120"/>
-                <a:ea typeface="微軟正黑體" pitchFamily="34" charset="-120"/>
-              </a:rPr>
-              <a:t>我們依靠神  就能施展大能</a:t>
-            </a:r>
-            <a:endParaRPr lang="en-US" altLang="zh-TW" sz="5400" b="1" dirty="0">
-              <a:solidFill>
-                <a:srgbClr val="000066"/>
-              </a:solidFill>
-              <a:latin typeface="微軟正黑體" pitchFamily="34" charset="-120"/>
-              <a:ea typeface="微軟正黑體" pitchFamily="34" charset="-120"/>
-            </a:endParaRPr>
-          </a:p>
-          <a:p>
-            <a:pPr algn="ctr">
-              <a:buNone/>
-            </a:pPr>
-            <a:r>
-              <a:rPr lang="zh-TW" altLang="en-US" sz="5400" b="1" dirty="0">
-                <a:solidFill>
-                  <a:srgbClr val="000066"/>
-                </a:solidFill>
-                <a:latin typeface="微軟正黑體" pitchFamily="34" charset="-120"/>
-                <a:ea typeface="微軟正黑體" pitchFamily="34" charset="-120"/>
-              </a:rPr>
-              <a:t>我們要歌頌  要歡呼</a:t>
-            </a:r>
-            <a:endParaRPr lang="en-US" altLang="zh-TW" sz="5400" b="1" dirty="0">
-              <a:solidFill>
-                <a:srgbClr val="000066"/>
-              </a:solidFill>
-              <a:latin typeface="微軟正黑體" pitchFamily="34" charset="-120"/>
-              <a:ea typeface="微軟正黑體" pitchFamily="34" charset="-120"/>
-            </a:endParaRPr>
-          </a:p>
-          <a:p>
-            <a:pPr algn="ctr">
-              <a:buNone/>
-            </a:pPr>
-            <a:r>
-              <a:rPr lang="zh-TW" altLang="en-US" sz="5400" b="1" dirty="0">
-                <a:solidFill>
-                  <a:srgbClr val="000066"/>
-                </a:solidFill>
-                <a:latin typeface="微軟正黑體" pitchFamily="34" charset="-120"/>
-                <a:ea typeface="微軟正黑體" pitchFamily="34" charset="-120"/>
-              </a:rPr>
-              <a:t>述說祂的作為</a:t>
-            </a:r>
-            <a:endParaRPr lang="en-US" altLang="zh-TW" sz="5400" b="1" dirty="0">
-              <a:solidFill>
-                <a:srgbClr val="000066"/>
-              </a:solidFill>
-              <a:latin typeface="微軟正黑體" pitchFamily="34" charset="-120"/>
-              <a:ea typeface="微軟正黑體" pitchFamily="34" charset="-120"/>
-            </a:endParaRPr>
-          </a:p>
-          <a:p>
-            <a:pPr algn="ctr">
-              <a:buNone/>
-            </a:pPr>
-            <a:r>
-              <a:rPr lang="zh-TW" altLang="en-US" sz="5400" b="1" dirty="0">
-                <a:solidFill>
-                  <a:srgbClr val="000066"/>
-                </a:solidFill>
-                <a:latin typeface="微軟正黑體" pitchFamily="34" charset="-120"/>
-                <a:ea typeface="微軟正黑體" pitchFamily="34" charset="-120"/>
-              </a:rPr>
-              <a:t>我們依靠神  就能施展大能</a:t>
-            </a:r>
           </a:p>
         </p:txBody>
       </p:sp>
@@ -3438,30 +3454,40 @@
       </p:grpSpPr>
       <p:sp>
         <p:nvSpPr>
-          <p:cNvPr id="4" name="標題 3"/>
-          <p:cNvSpPr>
-            <a:spLocks noGrp="1"/>
-          </p:cNvSpPr>
-          <p:nvPr>
-            <p:ph type="title"/>
-          </p:nvPr>
-        </p:nvSpPr>
-        <p:spPr/>
-        <p:txBody>
-          <a:bodyPr/>
-          <a:lstStyle/>
-          <a:p>
-            <a:r>
-              <a:rPr lang="zh-CN" altLang="en-US" b="1" dirty="0" smtClean="0">
+          <p:cNvPr id="5" name="內容版面配置區 4"/>
+          <p:cNvSpPr>
+            <a:spLocks noGrp="1"/>
+          </p:cNvSpPr>
+          <p:nvPr>
+            <p:ph idx="1"/>
+          </p:nvPr>
+        </p:nvSpPr>
+        <p:spPr>
+          <a:xfrm>
+            <a:off x="0" y="2084851"/>
+            <a:ext cx="12192000" cy="2404863"/>
+          </a:xfrm>
+        </p:spPr>
+        <p:txBody>
+          <a:bodyPr anchor="ctr">
+            <a:normAutofit/>
+          </a:bodyPr>
+          <a:lstStyle/>
+          <a:p>
+            <a:pPr algn="ctr">
+              <a:buNone/>
+            </a:pPr>
+            <a:r>
+              <a:rPr lang="zh-TW" altLang="en-US" sz="6400" b="1" dirty="0">
                 <a:solidFill>
                   <a:srgbClr val="000066"/>
                 </a:solidFill>
                 <a:latin typeface="微軟正黑體" pitchFamily="34" charset="-120"/>
                 <a:ea typeface="微軟正黑體" pitchFamily="34" charset="-120"/>
               </a:rPr>
-              <a:t>耶和華行了大事</a:t>
-            </a:r>
-            <a:endParaRPr lang="zh-TW" altLang="en-US" b="1" dirty="0">
+              <a:t>祂鋪張雲彩當遮蓋</a:t>
+            </a:r>
+            <a:endParaRPr lang="en-US" altLang="zh-TW" sz="6400" b="1" dirty="0">
               <a:solidFill>
                 <a:srgbClr val="000066"/>
               </a:solidFill>
@@ -3469,44 +3495,21 @@
               <a:ea typeface="微軟正黑體" pitchFamily="34" charset="-120"/>
             </a:endParaRPr>
           </a:p>
-        </p:txBody>
-      </p:sp>
-      <p:sp>
-        <p:nvSpPr>
-          <p:cNvPr id="5" name="內容版面配置區 4"/>
-          <p:cNvSpPr>
-            <a:spLocks noGrp="1"/>
-          </p:cNvSpPr>
-          <p:nvPr>
-            <p:ph idx="1"/>
-          </p:nvPr>
-        </p:nvSpPr>
-        <p:spPr>
-          <a:xfrm>
-            <a:off x="1524000" y="1600200"/>
-            <a:ext cx="9144000" cy="5257800"/>
-          </a:xfrm>
-        </p:spPr>
-        <p:txBody>
-          <a:bodyPr>
-            <a:normAutofit/>
-          </a:bodyPr>
-          <a:lstStyle/>
           <a:p>
             <a:pPr algn="ctr">
               <a:buNone/>
             </a:pPr>
             <a:r>
-              <a:rPr lang="zh-TW" altLang="en-US" sz="5400" b="1" dirty="0">
+              <a:rPr lang="zh-TW" altLang="en-US" sz="6400" b="1" dirty="0">
                 <a:solidFill>
                   <a:srgbClr val="000066"/>
                 </a:solidFill>
                 <a:latin typeface="微軟正黑體" pitchFamily="34" charset="-120"/>
                 <a:ea typeface="微軟正黑體" pitchFamily="34" charset="-120"/>
               </a:rPr>
-              <a:t>耶和華已經為我們行了大事</a:t>
-            </a:r>
-            <a:endParaRPr lang="en-US" altLang="zh-TW" sz="5400" b="1" dirty="0">
+              <a:t>夜間使火光照</a:t>
+            </a:r>
+            <a:endParaRPr lang="en-US" altLang="zh-TW" sz="6400" b="1" dirty="0">
               <a:solidFill>
                 <a:srgbClr val="000066"/>
               </a:solidFill>
@@ -3514,90 +3517,86 @@
               <a:ea typeface="微軟正黑體" pitchFamily="34" charset="-120"/>
             </a:endParaRPr>
           </a:p>
-          <a:p>
-            <a:pPr algn="ctr">
-              <a:buNone/>
-            </a:pPr>
-            <a:r>
-              <a:rPr lang="zh-TW" altLang="en-US" sz="5400" b="1" dirty="0">
-                <a:solidFill>
-                  <a:srgbClr val="000066"/>
-                </a:solidFill>
-                <a:latin typeface="微軟正黑體" pitchFamily="34" charset="-120"/>
-                <a:ea typeface="微軟正黑體" pitchFamily="34" charset="-120"/>
-              </a:rPr>
-              <a:t>祂命令狂風止息</a:t>
-            </a:r>
-            <a:endParaRPr lang="en-US" altLang="zh-TW" sz="5400" b="1" dirty="0">
+        </p:txBody>
+      </p:sp>
+      <p:sp>
+        <p:nvSpPr>
+          <p:cNvPr id="3" name="TextBox 2"/>
+          <p:cNvSpPr txBox="1"/>
+          <p:nvPr/>
+        </p:nvSpPr>
+        <p:spPr>
+          <a:xfrm>
+            <a:off x="0" y="5157193"/>
+            <a:ext cx="12192000" cy="584775"/>
+          </a:xfrm>
+          <a:prstGeom prst="rect">
+            <a:avLst/>
+          </a:prstGeom>
+          <a:noFill/>
+        </p:spPr>
+        <p:txBody>
+          <a:bodyPr wrap="square" rtlCol="0">
+            <a:spAutoFit/>
+          </a:bodyPr>
+          <a:lstStyle/>
+          <a:p>
+            <a:pPr algn="ctr"/>
+            <a:r>
+              <a:rPr lang="en-US" sz="3200" b="1" dirty="0">
+                <a:solidFill>
+                  <a:srgbClr val="000066"/>
+                </a:solidFill>
+                <a:latin typeface="Microsoft JhengHei" panose="020B0604030504040204" pitchFamily="34" charset="-120"/>
+                <a:ea typeface="Microsoft JhengHei" panose="020B0604030504040204" pitchFamily="34" charset="-120"/>
+              </a:rPr>
+              <a:t>( </a:t>
+            </a:r>
+            <a:r>
+              <a:rPr lang="zh-CN" altLang="en-US" sz="3200" b="1" dirty="0">
+                <a:solidFill>
+                  <a:srgbClr val="000066"/>
+                </a:solidFill>
+                <a:latin typeface="Microsoft JhengHei" panose="020B0604030504040204" pitchFamily="34" charset="-120"/>
+                <a:ea typeface="Microsoft JhengHei" panose="020B0604030504040204" pitchFamily="34" charset="-120"/>
+              </a:rPr>
+              <a:t>正歌 </a:t>
+            </a:r>
+            <a:r>
+              <a:rPr lang="en-US" altLang="zh-CN" sz="3200" b="1" dirty="0">
+                <a:solidFill>
+                  <a:srgbClr val="000066"/>
+                </a:solidFill>
+                <a:latin typeface="Microsoft JhengHei" panose="020B0604030504040204" pitchFamily="34" charset="-120"/>
+                <a:ea typeface="Microsoft JhengHei" panose="020B0604030504040204" pitchFamily="34" charset="-120"/>
+              </a:rPr>
+              <a:t>1</a:t>
+            </a:r>
+            <a:r>
+              <a:rPr lang="en-US" sz="3200" b="1" dirty="0">
+                <a:solidFill>
+                  <a:srgbClr val="000066"/>
+                </a:solidFill>
+                <a:latin typeface="Microsoft JhengHei" panose="020B0604030504040204" pitchFamily="34" charset="-120"/>
+                <a:ea typeface="Microsoft JhengHei" panose="020B0604030504040204" pitchFamily="34" charset="-120"/>
+              </a:rPr>
+              <a:t> )</a:t>
+            </a:r>
+            <a:endParaRPr lang="vi-VN" sz="3200" b="1" dirty="0">
               <a:solidFill>
                 <a:srgbClr val="000066"/>
               </a:solidFill>
-              <a:latin typeface="微軟正黑體" pitchFamily="34" charset="-120"/>
-              <a:ea typeface="微軟正黑體" pitchFamily="34" charset="-120"/>
+              <a:ea typeface="Microsoft JhengHei" panose="020B0604030504040204" pitchFamily="34" charset="-120"/>
             </a:endParaRPr>
           </a:p>
-          <a:p>
-            <a:pPr algn="ctr">
-              <a:buNone/>
-            </a:pPr>
-            <a:r>
-              <a:rPr lang="zh-TW" altLang="en-US" sz="5400" b="1" dirty="0">
-                <a:solidFill>
-                  <a:srgbClr val="000066"/>
-                </a:solidFill>
-                <a:latin typeface="微軟正黑體" pitchFamily="34" charset="-120"/>
-                <a:ea typeface="微軟正黑體" pitchFamily="34" charset="-120"/>
-              </a:rPr>
-              <a:t>那波浪就平靜</a:t>
-            </a:r>
-            <a:endParaRPr lang="en-US" altLang="zh-TW" sz="5400" b="1" dirty="0">
-              <a:solidFill>
-                <a:srgbClr val="000066"/>
-              </a:solidFill>
-              <a:latin typeface="微軟正黑體" pitchFamily="34" charset="-120"/>
-              <a:ea typeface="微軟正黑體" pitchFamily="34" charset="-120"/>
-            </a:endParaRPr>
-          </a:p>
-          <a:p>
-            <a:pPr algn="ctr">
-              <a:buNone/>
-            </a:pPr>
-            <a:r>
-              <a:rPr lang="zh-TW" altLang="en-US" sz="5400" b="1" dirty="0">
-                <a:solidFill>
-                  <a:srgbClr val="000066"/>
-                </a:solidFill>
-                <a:latin typeface="微軟正黑體" pitchFamily="34" charset="-120"/>
-                <a:ea typeface="微軟正黑體" pitchFamily="34" charset="-120"/>
-              </a:rPr>
-              <a:t>耶和華已經為我們行了大事</a:t>
-            </a:r>
-            <a:endParaRPr lang="en-US" altLang="zh-TW" sz="5400" b="1" dirty="0">
-              <a:solidFill>
-                <a:srgbClr val="000066"/>
-              </a:solidFill>
-              <a:latin typeface="微軟正黑體" pitchFamily="34" charset="-120"/>
-              <a:ea typeface="微軟正黑體" pitchFamily="34" charset="-120"/>
-            </a:endParaRPr>
-          </a:p>
-          <a:p>
-            <a:pPr algn="ctr">
-              <a:buNone/>
-            </a:pPr>
-            <a:r>
-              <a:rPr lang="zh-TW" altLang="en-US" sz="5400" b="1" dirty="0">
-                <a:solidFill>
-                  <a:srgbClr val="000066"/>
-                </a:solidFill>
-                <a:latin typeface="微軟正黑體" pitchFamily="34" charset="-120"/>
-                <a:ea typeface="微軟正黑體" pitchFamily="34" charset="-120"/>
-              </a:rPr>
-              <a:t>祂張開雙手我們就得飽足</a:t>
-            </a:r>
-          </a:p>
         </p:txBody>
       </p:sp>
     </p:spTree>
+    <p:extLst>
+      <p:ext uri="{BB962C8B-B14F-4D97-AF65-F5344CB8AC3E}">
+        <p14:creationId xmlns:p14="http://schemas.microsoft.com/office/powerpoint/2010/main" val="356446097"/>
+      </p:ext>
+    </p:extLst>
   </p:cSld>
   <p:clrMapOvr>
     <a:masterClrMapping/>
@@ -3624,30 +3623,40 @@
       </p:grpSpPr>
       <p:sp>
         <p:nvSpPr>
-          <p:cNvPr id="4" name="標題 3"/>
-          <p:cNvSpPr>
-            <a:spLocks noGrp="1"/>
-          </p:cNvSpPr>
-          <p:nvPr>
-            <p:ph type="title"/>
-          </p:nvPr>
-        </p:nvSpPr>
-        <p:spPr/>
-        <p:txBody>
-          <a:bodyPr/>
-          <a:lstStyle/>
-          <a:p>
-            <a:r>
-              <a:rPr lang="zh-CN" altLang="en-US" b="1" dirty="0" smtClean="0">
+          <p:cNvPr id="5" name="內容版面配置區 4"/>
+          <p:cNvSpPr>
+            <a:spLocks noGrp="1"/>
+          </p:cNvSpPr>
+          <p:nvPr>
+            <p:ph idx="1"/>
+          </p:nvPr>
+        </p:nvSpPr>
+        <p:spPr>
+          <a:xfrm>
+            <a:off x="0" y="2084851"/>
+            <a:ext cx="12192000" cy="2404863"/>
+          </a:xfrm>
+        </p:spPr>
+        <p:txBody>
+          <a:bodyPr anchor="ctr">
+            <a:normAutofit/>
+          </a:bodyPr>
+          <a:lstStyle/>
+          <a:p>
+            <a:pPr algn="ctr">
+              <a:buNone/>
+            </a:pPr>
+            <a:r>
+              <a:rPr lang="zh-TW" altLang="en-US" sz="6400" b="1" dirty="0">
                 <a:solidFill>
                   <a:srgbClr val="000066"/>
                 </a:solidFill>
                 <a:latin typeface="微軟正黑體" pitchFamily="34" charset="-120"/>
                 <a:ea typeface="微軟正黑體" pitchFamily="34" charset="-120"/>
               </a:rPr>
-              <a:t>耶和華行了大事</a:t>
-            </a:r>
-            <a:endParaRPr lang="zh-TW" altLang="en-US" b="1" dirty="0">
+              <a:t>耶和華已經為我們行了大事</a:t>
+            </a:r>
+            <a:endParaRPr lang="en-US" altLang="zh-TW" sz="6400" b="1" dirty="0">
               <a:solidFill>
                 <a:srgbClr val="000066"/>
               </a:solidFill>
@@ -3655,135 +3664,101 @@
               <a:ea typeface="微軟正黑體" pitchFamily="34" charset="-120"/>
             </a:endParaRPr>
           </a:p>
-        </p:txBody>
-      </p:sp>
-      <p:sp>
-        <p:nvSpPr>
-          <p:cNvPr id="5" name="內容版面配置區 4"/>
-          <p:cNvSpPr>
-            <a:spLocks noGrp="1"/>
-          </p:cNvSpPr>
-          <p:nvPr>
-            <p:ph idx="1"/>
-          </p:nvPr>
+          <a:p>
+            <a:pPr algn="ctr">
+              <a:buNone/>
+            </a:pPr>
+            <a:r>
+              <a:rPr lang="zh-TW" altLang="en-US" sz="6400" b="1" dirty="0">
+                <a:solidFill>
+                  <a:srgbClr val="000066"/>
+                </a:solidFill>
+                <a:latin typeface="微軟正黑體" pitchFamily="34" charset="-120"/>
+                <a:ea typeface="微軟正黑體" pitchFamily="34" charset="-120"/>
+              </a:rPr>
+              <a:t>祂在乾旱之處使水流成河</a:t>
+            </a:r>
+          </a:p>
+        </p:txBody>
+      </p:sp>
+      <p:sp>
+        <p:nvSpPr>
+          <p:cNvPr id="3" name="TextBox 2"/>
+          <p:cNvSpPr txBox="1"/>
+          <p:nvPr/>
         </p:nvSpPr>
         <p:spPr>
           <a:xfrm>
-            <a:off x="1524000" y="1600200"/>
-            <a:ext cx="9144000" cy="5257800"/>
+            <a:off x="0" y="5157193"/>
+            <a:ext cx="12192000" cy="584775"/>
           </a:xfrm>
+          <a:prstGeom prst="rect">
+            <a:avLst/>
+          </a:prstGeom>
+          <a:noFill/>
         </p:spPr>
         <p:txBody>
-          <a:bodyPr>
-            <a:normAutofit/>
+          <a:bodyPr wrap="square" rtlCol="0">
+            <a:spAutoFit/>
           </a:bodyPr>
           <a:lstStyle/>
           <a:p>
-            <a:pPr algn="ctr">
-              <a:buNone/>
-            </a:pPr>
-            <a:r>
-              <a:rPr lang="zh-TW" altLang="en-US" sz="5400" b="1" dirty="0">
-                <a:solidFill>
-                  <a:srgbClr val="000066"/>
-                </a:solidFill>
-                <a:latin typeface="微軟正黑體" pitchFamily="34" charset="-120"/>
-                <a:ea typeface="微軟正黑體" pitchFamily="34" charset="-120"/>
-              </a:rPr>
-              <a:t>我們要歡呼  述說祂的作為</a:t>
-            </a:r>
-            <a:endParaRPr lang="en-US" altLang="zh-TW" sz="5400" b="1" dirty="0">
+            <a:pPr algn="ctr"/>
+            <a:r>
+              <a:rPr lang="en-US" sz="3200" b="1" dirty="0">
+                <a:solidFill>
+                  <a:srgbClr val="000066"/>
+                </a:solidFill>
+                <a:latin typeface="Microsoft JhengHei" panose="020B0604030504040204" pitchFamily="34" charset="-120"/>
+                <a:ea typeface="Microsoft JhengHei" panose="020B0604030504040204" pitchFamily="34" charset="-120"/>
+              </a:rPr>
+              <a:t>( </a:t>
+            </a:r>
+            <a:r>
+              <a:rPr lang="zh-CN" altLang="en-US" sz="3200" b="1" dirty="0">
+                <a:solidFill>
+                  <a:srgbClr val="000066"/>
+                </a:solidFill>
+                <a:latin typeface="Microsoft JhengHei" panose="020B0604030504040204" pitchFamily="34" charset="-120"/>
+                <a:ea typeface="Microsoft JhengHei" panose="020B0604030504040204" pitchFamily="34" charset="-120"/>
+              </a:rPr>
+              <a:t>正歌 </a:t>
+            </a:r>
+            <a:r>
+              <a:rPr lang="en-US" altLang="zh-CN" sz="3200" b="1" dirty="0">
+                <a:solidFill>
+                  <a:srgbClr val="000066"/>
+                </a:solidFill>
+                <a:latin typeface="Microsoft JhengHei" panose="020B0604030504040204" pitchFamily="34" charset="-120"/>
+                <a:ea typeface="Microsoft JhengHei" panose="020B0604030504040204" pitchFamily="34" charset="-120"/>
+              </a:rPr>
+              <a:t>1</a:t>
+            </a:r>
+            <a:r>
+              <a:rPr lang="en-US" sz="3200" b="1" dirty="0">
+                <a:solidFill>
+                  <a:srgbClr val="000066"/>
+                </a:solidFill>
+                <a:latin typeface="Microsoft JhengHei" panose="020B0604030504040204" pitchFamily="34" charset="-120"/>
+                <a:ea typeface="Microsoft JhengHei" panose="020B0604030504040204" pitchFamily="34" charset="-120"/>
+              </a:rPr>
+              <a:t> )</a:t>
+            </a:r>
+            <a:endParaRPr lang="vi-VN" sz="3200" b="1" dirty="0">
               <a:solidFill>
                 <a:srgbClr val="000066"/>
               </a:solidFill>
-              <a:latin typeface="微軟正黑體" pitchFamily="34" charset="-120"/>
-              <a:ea typeface="微軟正黑體" pitchFamily="34" charset="-120"/>
+              <a:ea typeface="Microsoft JhengHei" panose="020B0604030504040204" pitchFamily="34" charset="-120"/>
             </a:endParaRPr>
           </a:p>
-          <a:p>
-            <a:pPr algn="ctr">
-              <a:buNone/>
-            </a:pPr>
-            <a:r>
-              <a:rPr lang="zh-TW" altLang="en-US" sz="5400" b="1" dirty="0">
-                <a:solidFill>
-                  <a:srgbClr val="000066"/>
-                </a:solidFill>
-                <a:latin typeface="微軟正黑體" pitchFamily="34" charset="-120"/>
-                <a:ea typeface="微軟正黑體" pitchFamily="34" charset="-120"/>
-              </a:rPr>
-              <a:t>我們依靠神  就能施展大能</a:t>
-            </a:r>
-            <a:endParaRPr lang="en-US" altLang="zh-TW" sz="5400" b="1" dirty="0">
-              <a:solidFill>
-                <a:srgbClr val="000066"/>
-              </a:solidFill>
-              <a:latin typeface="微軟正黑體" pitchFamily="34" charset="-120"/>
-              <a:ea typeface="微軟正黑體" pitchFamily="34" charset="-120"/>
-            </a:endParaRPr>
-          </a:p>
-          <a:p>
-            <a:pPr algn="ctr">
-              <a:buNone/>
-            </a:pPr>
-            <a:r>
-              <a:rPr lang="zh-TW" altLang="en-US" sz="5400" b="1" dirty="0">
-                <a:solidFill>
-                  <a:srgbClr val="000066"/>
-                </a:solidFill>
-                <a:latin typeface="微軟正黑體" pitchFamily="34" charset="-120"/>
-                <a:ea typeface="微軟正黑體" pitchFamily="34" charset="-120"/>
-              </a:rPr>
-              <a:t>我們要歌頌  要歡呼</a:t>
-            </a:r>
-            <a:endParaRPr lang="en-US" altLang="zh-TW" sz="5400" b="1" dirty="0">
-              <a:solidFill>
-                <a:srgbClr val="000066"/>
-              </a:solidFill>
-              <a:latin typeface="微軟正黑體" pitchFamily="34" charset="-120"/>
-              <a:ea typeface="微軟正黑體" pitchFamily="34" charset="-120"/>
-            </a:endParaRPr>
-          </a:p>
-          <a:p>
-            <a:pPr algn="ctr">
-              <a:buNone/>
-            </a:pPr>
-            <a:r>
-              <a:rPr lang="zh-TW" altLang="en-US" sz="5400" b="1" dirty="0">
-                <a:solidFill>
-                  <a:srgbClr val="000066"/>
-                </a:solidFill>
-                <a:latin typeface="微軟正黑體" pitchFamily="34" charset="-120"/>
-                <a:ea typeface="微軟正黑體" pitchFamily="34" charset="-120"/>
-              </a:rPr>
-              <a:t>述說祂的作為</a:t>
-            </a:r>
-            <a:endParaRPr lang="en-US" altLang="zh-TW" sz="5400" b="1" dirty="0">
-              <a:solidFill>
-                <a:srgbClr val="000066"/>
-              </a:solidFill>
-              <a:latin typeface="微軟正黑體" pitchFamily="34" charset="-120"/>
-              <a:ea typeface="微軟正黑體" pitchFamily="34" charset="-120"/>
-            </a:endParaRPr>
-          </a:p>
-          <a:p>
-            <a:pPr algn="ctr">
-              <a:buNone/>
-            </a:pPr>
-            <a:r>
-              <a:rPr lang="zh-TW" altLang="en-US" sz="5400" b="1" dirty="0">
-                <a:solidFill>
-                  <a:srgbClr val="000066"/>
-                </a:solidFill>
-                <a:latin typeface="微軟正黑體" pitchFamily="34" charset="-120"/>
-                <a:ea typeface="微軟正黑體" pitchFamily="34" charset="-120"/>
-              </a:rPr>
-              <a:t>我們依靠神  就能施展大能</a:t>
-            </a:r>
-          </a:p>
         </p:txBody>
       </p:sp>
     </p:spTree>
+    <p:extLst>
+      <p:ext uri="{BB962C8B-B14F-4D97-AF65-F5344CB8AC3E}">
+        <p14:creationId xmlns:p14="http://schemas.microsoft.com/office/powerpoint/2010/main" val="2644284424"/>
+      </p:ext>
+    </p:extLst>
   </p:cSld>
   <p:clrMapOvr>
     <a:masterClrMapping/>
@@ -3810,30 +3785,40 @@
       </p:grpSpPr>
       <p:sp>
         <p:nvSpPr>
-          <p:cNvPr id="4" name="標題 3"/>
-          <p:cNvSpPr>
-            <a:spLocks noGrp="1"/>
-          </p:cNvSpPr>
-          <p:nvPr>
-            <p:ph type="title"/>
-          </p:nvPr>
-        </p:nvSpPr>
-        <p:spPr/>
-        <p:txBody>
-          <a:bodyPr/>
-          <a:lstStyle/>
-          <a:p>
-            <a:r>
-              <a:rPr lang="zh-CN" altLang="en-US" b="1" dirty="0" smtClean="0">
+          <p:cNvPr id="5" name="內容版面配置區 4"/>
+          <p:cNvSpPr>
+            <a:spLocks noGrp="1"/>
+          </p:cNvSpPr>
+          <p:nvPr>
+            <p:ph idx="1"/>
+          </p:nvPr>
+        </p:nvSpPr>
+        <p:spPr>
+          <a:xfrm>
+            <a:off x="0" y="2084851"/>
+            <a:ext cx="12192000" cy="2404863"/>
+          </a:xfrm>
+        </p:spPr>
+        <p:txBody>
+          <a:bodyPr anchor="ctr">
+            <a:normAutofit/>
+          </a:bodyPr>
+          <a:lstStyle/>
+          <a:p>
+            <a:pPr algn="ctr">
+              <a:buNone/>
+            </a:pPr>
+            <a:r>
+              <a:rPr lang="zh-TW" altLang="en-US" sz="6400" b="1" dirty="0">
                 <a:solidFill>
                   <a:srgbClr val="000066"/>
                 </a:solidFill>
                 <a:latin typeface="微軟正黑體" pitchFamily="34" charset="-120"/>
                 <a:ea typeface="微軟正黑體" pitchFamily="34" charset="-120"/>
               </a:rPr>
-              <a:t>耶和華行了大事</a:t>
-            </a:r>
-            <a:endParaRPr lang="zh-TW" altLang="en-US" b="1" dirty="0">
+              <a:t>我們要歡呼  述說祂的作為</a:t>
+            </a:r>
+            <a:endParaRPr lang="en-US" altLang="zh-TW" sz="6400" b="1" dirty="0">
               <a:solidFill>
                 <a:srgbClr val="000066"/>
               </a:solidFill>
@@ -3841,44 +3826,21 @@
               <a:ea typeface="微軟正黑體" pitchFamily="34" charset="-120"/>
             </a:endParaRPr>
           </a:p>
-        </p:txBody>
-      </p:sp>
-      <p:sp>
-        <p:nvSpPr>
-          <p:cNvPr id="5" name="內容版面配置區 4"/>
-          <p:cNvSpPr>
-            <a:spLocks noGrp="1"/>
-          </p:cNvSpPr>
-          <p:nvPr>
-            <p:ph idx="1"/>
-          </p:nvPr>
-        </p:nvSpPr>
-        <p:spPr>
-          <a:xfrm>
-            <a:off x="1524000" y="1600200"/>
-            <a:ext cx="9144000" cy="5257800"/>
-          </a:xfrm>
-        </p:spPr>
-        <p:txBody>
-          <a:bodyPr>
-            <a:normAutofit/>
-          </a:bodyPr>
-          <a:lstStyle/>
           <a:p>
             <a:pPr algn="ctr">
               <a:buNone/>
             </a:pPr>
             <a:r>
-              <a:rPr lang="zh-TW" altLang="en-US" sz="5400" b="1" dirty="0">
+              <a:rPr lang="zh-TW" altLang="en-US" sz="6400" b="1" dirty="0">
                 <a:solidFill>
                   <a:srgbClr val="000066"/>
                 </a:solidFill>
                 <a:latin typeface="微軟正黑體" pitchFamily="34" charset="-120"/>
                 <a:ea typeface="微軟正黑體" pitchFamily="34" charset="-120"/>
               </a:rPr>
-              <a:t>祂必帶領選民歡呼向前</a:t>
-            </a:r>
-            <a:endParaRPr lang="en-US" altLang="zh-TW" sz="5400" b="1" dirty="0">
+              <a:t>我們依靠神  就能施展大能</a:t>
+            </a:r>
+            <a:endParaRPr lang="en-US" altLang="zh-TW" sz="6400" b="1" dirty="0">
               <a:solidFill>
                 <a:srgbClr val="000066"/>
               </a:solidFill>
@@ -3886,24 +3848,696 @@
               <a:ea typeface="微軟正黑體" pitchFamily="34" charset="-120"/>
             </a:endParaRPr>
           </a:p>
+        </p:txBody>
+      </p:sp>
+      <p:sp>
+        <p:nvSpPr>
+          <p:cNvPr id="3" name="TextBox 2"/>
+          <p:cNvSpPr txBox="1"/>
+          <p:nvPr/>
+        </p:nvSpPr>
+        <p:spPr>
+          <a:xfrm>
+            <a:off x="0" y="5157193"/>
+            <a:ext cx="12192000" cy="584775"/>
+          </a:xfrm>
+          <a:prstGeom prst="rect">
+            <a:avLst/>
+          </a:prstGeom>
+          <a:noFill/>
+        </p:spPr>
+        <p:txBody>
+          <a:bodyPr wrap="square" rtlCol="0">
+            <a:spAutoFit/>
+          </a:bodyPr>
+          <a:lstStyle/>
+          <a:p>
+            <a:pPr algn="ctr"/>
+            <a:r>
+              <a:rPr lang="en-US" sz="3200" b="1" dirty="0">
+                <a:solidFill>
+                  <a:srgbClr val="000066"/>
+                </a:solidFill>
+                <a:latin typeface="Microsoft JhengHei" panose="020B0604030504040204" pitchFamily="34" charset="-120"/>
+                <a:ea typeface="Microsoft JhengHei" panose="020B0604030504040204" pitchFamily="34" charset="-120"/>
+              </a:rPr>
+              <a:t>( </a:t>
+            </a:r>
+            <a:r>
+              <a:rPr lang="zh-CN" altLang="en-US" sz="3200" b="1" dirty="0">
+                <a:solidFill>
+                  <a:srgbClr val="000066"/>
+                </a:solidFill>
+                <a:latin typeface="Microsoft JhengHei" panose="020B0604030504040204" pitchFamily="34" charset="-120"/>
+                <a:ea typeface="Microsoft JhengHei" panose="020B0604030504040204" pitchFamily="34" charset="-120"/>
+              </a:rPr>
+              <a:t>副歌</a:t>
+            </a:r>
+            <a:r>
+              <a:rPr lang="en-US" sz="3200" b="1" dirty="0">
+                <a:solidFill>
+                  <a:srgbClr val="000066"/>
+                </a:solidFill>
+                <a:latin typeface="Microsoft JhengHei" panose="020B0604030504040204" pitchFamily="34" charset="-120"/>
+                <a:ea typeface="Microsoft JhengHei" panose="020B0604030504040204" pitchFamily="34" charset="-120"/>
+              </a:rPr>
+              <a:t> )</a:t>
+            </a:r>
+            <a:endParaRPr lang="vi-VN" sz="3200" b="1" dirty="0">
+              <a:solidFill>
+                <a:srgbClr val="000066"/>
+              </a:solidFill>
+              <a:ea typeface="Microsoft JhengHei" panose="020B0604030504040204" pitchFamily="34" charset="-120"/>
+            </a:endParaRPr>
+          </a:p>
+        </p:txBody>
+      </p:sp>
+    </p:spTree>
+    <p:extLst>
+      <p:ext uri="{BB962C8B-B14F-4D97-AF65-F5344CB8AC3E}">
+        <p14:creationId xmlns:p14="http://schemas.microsoft.com/office/powerpoint/2010/main" val="3561743546"/>
+      </p:ext>
+    </p:extLst>
+  </p:cSld>
+  <p:clrMapOvr>
+    <a:masterClrMapping/>
+  </p:clrMapOvr>
+</p:sld>
+</file>
+
+<file path=ppt/slides/slide6.xml><?xml version="1.0" encoding="utf-8"?>
+<p:sld xmlns:a="http://schemas.openxmlformats.org/drawingml/2006/main" xmlns:r="http://schemas.openxmlformats.org/officeDocument/2006/relationships" xmlns:p="http://schemas.openxmlformats.org/presentationml/2006/main">
+  <p:cSld>
+    <p:spTree>
+      <p:nvGrpSpPr>
+        <p:cNvPr id="1" name=""/>
+        <p:cNvGrpSpPr/>
+        <p:nvPr/>
+      </p:nvGrpSpPr>
+      <p:grpSpPr>
+        <a:xfrm>
+          <a:off x="0" y="0"/>
+          <a:ext cx="0" cy="0"/>
+          <a:chOff x="0" y="0"/>
+          <a:chExt cx="0" cy="0"/>
+        </a:xfrm>
+      </p:grpSpPr>
+      <p:sp>
+        <p:nvSpPr>
+          <p:cNvPr id="5" name="內容版面配置區 4"/>
+          <p:cNvSpPr>
+            <a:spLocks noGrp="1"/>
+          </p:cNvSpPr>
+          <p:nvPr>
+            <p:ph idx="1"/>
+          </p:nvPr>
+        </p:nvSpPr>
+        <p:spPr>
+          <a:xfrm>
+            <a:off x="0" y="2084851"/>
+            <a:ext cx="12192000" cy="2404863"/>
+          </a:xfrm>
+        </p:spPr>
+        <p:txBody>
+          <a:bodyPr anchor="ctr">
+            <a:normAutofit/>
+          </a:bodyPr>
+          <a:lstStyle/>
           <a:p>
             <a:pPr algn="ctr">
               <a:buNone/>
             </a:pPr>
             <a:r>
-              <a:rPr lang="zh-TW" altLang="en-US" sz="5400" b="1" dirty="0">
+              <a:rPr lang="zh-TW" altLang="en-US" sz="6400" b="1" dirty="0">
                 <a:solidFill>
                   <a:srgbClr val="000066"/>
                 </a:solidFill>
                 <a:latin typeface="微軟正黑體" pitchFamily="34" charset="-120"/>
                 <a:ea typeface="微軟正黑體" pitchFamily="34" charset="-120"/>
               </a:rPr>
-              <a:t>祂將列國的地賜給我們</a:t>
-            </a:r>
+              <a:t>我們要歌頌  要歡呼</a:t>
+            </a:r>
+            <a:endParaRPr lang="en-US" altLang="zh-TW" sz="6400" b="1" dirty="0">
+              <a:solidFill>
+                <a:srgbClr val="000066"/>
+              </a:solidFill>
+              <a:latin typeface="微軟正黑體" pitchFamily="34" charset="-120"/>
+              <a:ea typeface="微軟正黑體" pitchFamily="34" charset="-120"/>
+            </a:endParaRPr>
+          </a:p>
+          <a:p>
+            <a:pPr algn="ctr">
+              <a:buNone/>
+            </a:pPr>
+            <a:r>
+              <a:rPr lang="zh-TW" altLang="en-US" sz="6400" b="1" dirty="0">
+                <a:solidFill>
+                  <a:srgbClr val="000066"/>
+                </a:solidFill>
+                <a:latin typeface="微軟正黑體" pitchFamily="34" charset="-120"/>
+                <a:ea typeface="微軟正黑體" pitchFamily="34" charset="-120"/>
+              </a:rPr>
+              <a:t>述說祂的作為</a:t>
+            </a:r>
+            <a:endParaRPr lang="en-US" altLang="zh-TW" sz="6400" b="1" dirty="0">
+              <a:solidFill>
+                <a:srgbClr val="000066"/>
+              </a:solidFill>
+              <a:latin typeface="微軟正黑體" pitchFamily="34" charset="-120"/>
+              <a:ea typeface="微軟正黑體" pitchFamily="34" charset="-120"/>
+            </a:endParaRPr>
+          </a:p>
+        </p:txBody>
+      </p:sp>
+      <p:sp>
+        <p:nvSpPr>
+          <p:cNvPr id="3" name="TextBox 2"/>
+          <p:cNvSpPr txBox="1"/>
+          <p:nvPr/>
+        </p:nvSpPr>
+        <p:spPr>
+          <a:xfrm>
+            <a:off x="0" y="5157193"/>
+            <a:ext cx="12192000" cy="584775"/>
+          </a:xfrm>
+          <a:prstGeom prst="rect">
+            <a:avLst/>
+          </a:prstGeom>
+          <a:noFill/>
+        </p:spPr>
+        <p:txBody>
+          <a:bodyPr wrap="square" rtlCol="0">
+            <a:spAutoFit/>
+          </a:bodyPr>
+          <a:lstStyle/>
+          <a:p>
+            <a:pPr algn="ctr"/>
+            <a:r>
+              <a:rPr lang="en-US" sz="3200" b="1" dirty="0">
+                <a:solidFill>
+                  <a:srgbClr val="000066"/>
+                </a:solidFill>
+                <a:latin typeface="Microsoft JhengHei" panose="020B0604030504040204" pitchFamily="34" charset="-120"/>
+                <a:ea typeface="Microsoft JhengHei" panose="020B0604030504040204" pitchFamily="34" charset="-120"/>
+              </a:rPr>
+              <a:t>( </a:t>
+            </a:r>
+            <a:r>
+              <a:rPr lang="zh-CN" altLang="en-US" sz="3200" b="1" dirty="0">
+                <a:solidFill>
+                  <a:srgbClr val="000066"/>
+                </a:solidFill>
+                <a:latin typeface="Microsoft JhengHei" panose="020B0604030504040204" pitchFamily="34" charset="-120"/>
+                <a:ea typeface="Microsoft JhengHei" panose="020B0604030504040204" pitchFamily="34" charset="-120"/>
+              </a:rPr>
+              <a:t>副歌</a:t>
+            </a:r>
+            <a:r>
+              <a:rPr lang="en-US" sz="3200" b="1" dirty="0">
+                <a:solidFill>
+                  <a:srgbClr val="000066"/>
+                </a:solidFill>
+                <a:latin typeface="Microsoft JhengHei" panose="020B0604030504040204" pitchFamily="34" charset="-120"/>
+                <a:ea typeface="Microsoft JhengHei" panose="020B0604030504040204" pitchFamily="34" charset="-120"/>
+              </a:rPr>
+              <a:t> )</a:t>
+            </a:r>
+            <a:endParaRPr lang="vi-VN" sz="3200" b="1" dirty="0">
+              <a:solidFill>
+                <a:srgbClr val="000066"/>
+              </a:solidFill>
+              <a:ea typeface="Microsoft JhengHei" panose="020B0604030504040204" pitchFamily="34" charset="-120"/>
+            </a:endParaRPr>
           </a:p>
         </p:txBody>
       </p:sp>
     </p:spTree>
+    <p:extLst>
+      <p:ext uri="{BB962C8B-B14F-4D97-AF65-F5344CB8AC3E}">
+        <p14:creationId xmlns:p14="http://schemas.microsoft.com/office/powerpoint/2010/main" val="412257157"/>
+      </p:ext>
+    </p:extLst>
+  </p:cSld>
+  <p:clrMapOvr>
+    <a:masterClrMapping/>
+  </p:clrMapOvr>
+</p:sld>
+</file>
+
+<file path=ppt/slides/slide7.xml><?xml version="1.0" encoding="utf-8"?>
+<p:sld xmlns:a="http://schemas.openxmlformats.org/drawingml/2006/main" xmlns:r="http://schemas.openxmlformats.org/officeDocument/2006/relationships" xmlns:p="http://schemas.openxmlformats.org/presentationml/2006/main">
+  <p:cSld>
+    <p:spTree>
+      <p:nvGrpSpPr>
+        <p:cNvPr id="1" name=""/>
+        <p:cNvGrpSpPr/>
+        <p:nvPr/>
+      </p:nvGrpSpPr>
+      <p:grpSpPr>
+        <a:xfrm>
+          <a:off x="0" y="0"/>
+          <a:ext cx="0" cy="0"/>
+          <a:chOff x="0" y="0"/>
+          <a:chExt cx="0" cy="0"/>
+        </a:xfrm>
+      </p:grpSpPr>
+      <p:sp>
+        <p:nvSpPr>
+          <p:cNvPr id="5" name="內容版面配置區 4"/>
+          <p:cNvSpPr>
+            <a:spLocks noGrp="1"/>
+          </p:cNvSpPr>
+          <p:nvPr>
+            <p:ph idx="1"/>
+          </p:nvPr>
+        </p:nvSpPr>
+        <p:spPr>
+          <a:xfrm>
+            <a:off x="0" y="2084851"/>
+            <a:ext cx="12192000" cy="2404863"/>
+          </a:xfrm>
+        </p:spPr>
+        <p:txBody>
+          <a:bodyPr anchor="ctr">
+            <a:normAutofit/>
+          </a:bodyPr>
+          <a:lstStyle/>
+          <a:p>
+            <a:pPr algn="ctr">
+              <a:buNone/>
+            </a:pPr>
+            <a:r>
+              <a:rPr lang="zh-TW" altLang="en-US" sz="6400" b="1" dirty="0">
+                <a:solidFill>
+                  <a:srgbClr val="000066"/>
+                </a:solidFill>
+                <a:latin typeface="微軟正黑體" pitchFamily="34" charset="-120"/>
+                <a:ea typeface="微軟正黑體" pitchFamily="34" charset="-120"/>
+              </a:rPr>
+              <a:t>我們依靠神  就能施展大能</a:t>
+            </a:r>
+          </a:p>
+        </p:txBody>
+      </p:sp>
+      <p:sp>
+        <p:nvSpPr>
+          <p:cNvPr id="3" name="TextBox 2"/>
+          <p:cNvSpPr txBox="1"/>
+          <p:nvPr/>
+        </p:nvSpPr>
+        <p:spPr>
+          <a:xfrm>
+            <a:off x="0" y="5157193"/>
+            <a:ext cx="12192000" cy="584775"/>
+          </a:xfrm>
+          <a:prstGeom prst="rect">
+            <a:avLst/>
+          </a:prstGeom>
+          <a:noFill/>
+        </p:spPr>
+        <p:txBody>
+          <a:bodyPr wrap="square" rtlCol="0">
+            <a:spAutoFit/>
+          </a:bodyPr>
+          <a:lstStyle/>
+          <a:p>
+            <a:pPr algn="ctr"/>
+            <a:r>
+              <a:rPr lang="en-US" sz="3200" b="1" dirty="0">
+                <a:solidFill>
+                  <a:srgbClr val="000066"/>
+                </a:solidFill>
+                <a:latin typeface="Microsoft JhengHei" panose="020B0604030504040204" pitchFamily="34" charset="-120"/>
+                <a:ea typeface="Microsoft JhengHei" panose="020B0604030504040204" pitchFamily="34" charset="-120"/>
+              </a:rPr>
+              <a:t>( </a:t>
+            </a:r>
+            <a:r>
+              <a:rPr lang="zh-CN" altLang="en-US" sz="3200" b="1" dirty="0">
+                <a:solidFill>
+                  <a:srgbClr val="000066"/>
+                </a:solidFill>
+                <a:latin typeface="Microsoft JhengHei" panose="020B0604030504040204" pitchFamily="34" charset="-120"/>
+                <a:ea typeface="Microsoft JhengHei" panose="020B0604030504040204" pitchFamily="34" charset="-120"/>
+              </a:rPr>
+              <a:t>副歌</a:t>
+            </a:r>
+            <a:r>
+              <a:rPr lang="en-US" sz="3200" b="1" dirty="0">
+                <a:solidFill>
+                  <a:srgbClr val="000066"/>
+                </a:solidFill>
+                <a:latin typeface="Microsoft JhengHei" panose="020B0604030504040204" pitchFamily="34" charset="-120"/>
+                <a:ea typeface="Microsoft JhengHei" panose="020B0604030504040204" pitchFamily="34" charset="-120"/>
+              </a:rPr>
+              <a:t> )</a:t>
+            </a:r>
+            <a:endParaRPr lang="vi-VN" sz="3200" b="1" dirty="0">
+              <a:solidFill>
+                <a:srgbClr val="000066"/>
+              </a:solidFill>
+              <a:ea typeface="Microsoft JhengHei" panose="020B0604030504040204" pitchFamily="34" charset="-120"/>
+            </a:endParaRPr>
+          </a:p>
+        </p:txBody>
+      </p:sp>
+    </p:spTree>
+    <p:extLst>
+      <p:ext uri="{BB962C8B-B14F-4D97-AF65-F5344CB8AC3E}">
+        <p14:creationId xmlns:p14="http://schemas.microsoft.com/office/powerpoint/2010/main" val="1250558506"/>
+      </p:ext>
+    </p:extLst>
+  </p:cSld>
+  <p:clrMapOvr>
+    <a:masterClrMapping/>
+  </p:clrMapOvr>
+</p:sld>
+</file>
+
+<file path=ppt/slides/slide8.xml><?xml version="1.0" encoding="utf-8"?>
+<p:sld xmlns:a="http://schemas.openxmlformats.org/drawingml/2006/main" xmlns:r="http://schemas.openxmlformats.org/officeDocument/2006/relationships" xmlns:p="http://schemas.openxmlformats.org/presentationml/2006/main">
+  <p:cSld>
+    <p:spTree>
+      <p:nvGrpSpPr>
+        <p:cNvPr id="1" name=""/>
+        <p:cNvGrpSpPr/>
+        <p:nvPr/>
+      </p:nvGrpSpPr>
+      <p:grpSpPr>
+        <a:xfrm>
+          <a:off x="0" y="0"/>
+          <a:ext cx="0" cy="0"/>
+          <a:chOff x="0" y="0"/>
+          <a:chExt cx="0" cy="0"/>
+        </a:xfrm>
+      </p:grpSpPr>
+      <p:sp>
+        <p:nvSpPr>
+          <p:cNvPr id="5" name="內容版面配置區 4"/>
+          <p:cNvSpPr>
+            <a:spLocks noGrp="1"/>
+          </p:cNvSpPr>
+          <p:nvPr>
+            <p:ph idx="1"/>
+          </p:nvPr>
+        </p:nvSpPr>
+        <p:spPr>
+          <a:xfrm>
+            <a:off x="0" y="2084851"/>
+            <a:ext cx="12192000" cy="2404863"/>
+          </a:xfrm>
+        </p:spPr>
+        <p:txBody>
+          <a:bodyPr anchor="ctr">
+            <a:normAutofit/>
+          </a:bodyPr>
+          <a:lstStyle/>
+          <a:p>
+            <a:pPr algn="ctr">
+              <a:buNone/>
+            </a:pPr>
+            <a:r>
+              <a:rPr lang="zh-TW" altLang="en-US" sz="6400" b="1" dirty="0">
+                <a:solidFill>
+                  <a:srgbClr val="000066"/>
+                </a:solidFill>
+                <a:latin typeface="微軟正黑體" pitchFamily="34" charset="-120"/>
+                <a:ea typeface="微軟正黑體" pitchFamily="34" charset="-120"/>
+              </a:rPr>
+              <a:t>耶和華已經為我們行了大事</a:t>
+            </a:r>
+            <a:endParaRPr lang="en-US" altLang="zh-TW" sz="6400" b="1" dirty="0">
+              <a:solidFill>
+                <a:srgbClr val="000066"/>
+              </a:solidFill>
+              <a:latin typeface="微軟正黑體" pitchFamily="34" charset="-120"/>
+              <a:ea typeface="微軟正黑體" pitchFamily="34" charset="-120"/>
+            </a:endParaRPr>
+          </a:p>
+          <a:p>
+            <a:pPr algn="ctr">
+              <a:buNone/>
+            </a:pPr>
+            <a:r>
+              <a:rPr lang="zh-TW" altLang="en-US" sz="6400" b="1" dirty="0">
+                <a:solidFill>
+                  <a:srgbClr val="000066"/>
+                </a:solidFill>
+                <a:latin typeface="微軟正黑體" pitchFamily="34" charset="-120"/>
+                <a:ea typeface="微軟正黑體" pitchFamily="34" charset="-120"/>
+              </a:rPr>
+              <a:t>祂命令狂風止息  那波浪就平靜</a:t>
+            </a:r>
+            <a:endParaRPr lang="en-US" altLang="zh-TW" sz="6400" b="1" dirty="0">
+              <a:solidFill>
+                <a:srgbClr val="000066"/>
+              </a:solidFill>
+              <a:latin typeface="微軟正黑體" pitchFamily="34" charset="-120"/>
+              <a:ea typeface="微軟正黑體" pitchFamily="34" charset="-120"/>
+            </a:endParaRPr>
+          </a:p>
+        </p:txBody>
+      </p:sp>
+      <p:sp>
+        <p:nvSpPr>
+          <p:cNvPr id="3" name="TextBox 2"/>
+          <p:cNvSpPr txBox="1"/>
+          <p:nvPr/>
+        </p:nvSpPr>
+        <p:spPr>
+          <a:xfrm>
+            <a:off x="0" y="5157193"/>
+            <a:ext cx="12192000" cy="584775"/>
+          </a:xfrm>
+          <a:prstGeom prst="rect">
+            <a:avLst/>
+          </a:prstGeom>
+          <a:noFill/>
+        </p:spPr>
+        <p:txBody>
+          <a:bodyPr wrap="square" rtlCol="0">
+            <a:spAutoFit/>
+          </a:bodyPr>
+          <a:lstStyle/>
+          <a:p>
+            <a:pPr algn="ctr"/>
+            <a:r>
+              <a:rPr lang="en-US" sz="3200" b="1" dirty="0">
+                <a:solidFill>
+                  <a:srgbClr val="000066"/>
+                </a:solidFill>
+                <a:latin typeface="Microsoft JhengHei" panose="020B0604030504040204" pitchFamily="34" charset="-120"/>
+                <a:ea typeface="Microsoft JhengHei" panose="020B0604030504040204" pitchFamily="34" charset="-120"/>
+              </a:rPr>
+              <a:t>( </a:t>
+            </a:r>
+            <a:r>
+              <a:rPr lang="zh-CN" altLang="en-US" sz="3200" b="1" dirty="0">
+                <a:solidFill>
+                  <a:srgbClr val="000066"/>
+                </a:solidFill>
+                <a:latin typeface="Microsoft JhengHei" panose="020B0604030504040204" pitchFamily="34" charset="-120"/>
+                <a:ea typeface="Microsoft JhengHei" panose="020B0604030504040204" pitchFamily="34" charset="-120"/>
+              </a:rPr>
+              <a:t>正歌 </a:t>
+            </a:r>
+            <a:r>
+              <a:rPr lang="en-US" altLang="zh-CN" sz="3200" b="1" dirty="0">
+                <a:solidFill>
+                  <a:srgbClr val="000066"/>
+                </a:solidFill>
+                <a:latin typeface="Microsoft JhengHei" panose="020B0604030504040204" pitchFamily="34" charset="-120"/>
+                <a:ea typeface="Microsoft JhengHei" panose="020B0604030504040204" pitchFamily="34" charset="-120"/>
+              </a:rPr>
+              <a:t>2</a:t>
+            </a:r>
+            <a:r>
+              <a:rPr lang="en-US" sz="3200" b="1" dirty="0">
+                <a:solidFill>
+                  <a:srgbClr val="000066"/>
+                </a:solidFill>
+                <a:latin typeface="Microsoft JhengHei" panose="020B0604030504040204" pitchFamily="34" charset="-120"/>
+                <a:ea typeface="Microsoft JhengHei" panose="020B0604030504040204" pitchFamily="34" charset="-120"/>
+              </a:rPr>
+              <a:t> )</a:t>
+            </a:r>
+            <a:endParaRPr lang="vi-VN" sz="3200" b="1" dirty="0">
+              <a:solidFill>
+                <a:srgbClr val="000066"/>
+              </a:solidFill>
+              <a:ea typeface="Microsoft JhengHei" panose="020B0604030504040204" pitchFamily="34" charset="-120"/>
+            </a:endParaRPr>
+          </a:p>
+        </p:txBody>
+      </p:sp>
+    </p:spTree>
+    <p:extLst>
+      <p:ext uri="{BB962C8B-B14F-4D97-AF65-F5344CB8AC3E}">
+        <p14:creationId xmlns:p14="http://schemas.microsoft.com/office/powerpoint/2010/main" val="2451620880"/>
+      </p:ext>
+    </p:extLst>
+  </p:cSld>
+  <p:clrMapOvr>
+    <a:masterClrMapping/>
+  </p:clrMapOvr>
+</p:sld>
+</file>
+
+<file path=ppt/slides/slide9.xml><?xml version="1.0" encoding="utf-8"?>
+<p:sld xmlns:a="http://schemas.openxmlformats.org/drawingml/2006/main" xmlns:r="http://schemas.openxmlformats.org/officeDocument/2006/relationships" xmlns:p="http://schemas.openxmlformats.org/presentationml/2006/main">
+  <p:cSld>
+    <p:spTree>
+      <p:nvGrpSpPr>
+        <p:cNvPr id="1" name=""/>
+        <p:cNvGrpSpPr/>
+        <p:nvPr/>
+      </p:nvGrpSpPr>
+      <p:grpSpPr>
+        <a:xfrm>
+          <a:off x="0" y="0"/>
+          <a:ext cx="0" cy="0"/>
+          <a:chOff x="0" y="0"/>
+          <a:chExt cx="0" cy="0"/>
+        </a:xfrm>
+      </p:grpSpPr>
+      <p:sp>
+        <p:nvSpPr>
+          <p:cNvPr id="5" name="內容版面配置區 4"/>
+          <p:cNvSpPr>
+            <a:spLocks noGrp="1"/>
+          </p:cNvSpPr>
+          <p:nvPr>
+            <p:ph idx="1"/>
+          </p:nvPr>
+        </p:nvSpPr>
+        <p:spPr>
+          <a:xfrm>
+            <a:off x="0" y="2084851"/>
+            <a:ext cx="12192000" cy="2404863"/>
+          </a:xfrm>
+        </p:spPr>
+        <p:txBody>
+          <a:bodyPr anchor="ctr">
+            <a:normAutofit/>
+          </a:bodyPr>
+          <a:lstStyle/>
+          <a:p>
+            <a:pPr algn="ctr">
+              <a:buNone/>
+            </a:pPr>
+            <a:r>
+              <a:rPr lang="zh-TW" altLang="en-US" sz="6400" b="1" dirty="0">
+                <a:solidFill>
+                  <a:srgbClr val="000066"/>
+                </a:solidFill>
+                <a:latin typeface="微軟正黑體" pitchFamily="34" charset="-120"/>
+                <a:ea typeface="微軟正黑體" pitchFamily="34" charset="-120"/>
+              </a:rPr>
+              <a:t>耶和華已經為我們行了大事</a:t>
+            </a:r>
+            <a:endParaRPr lang="en-US" altLang="zh-TW" sz="6400" b="1" dirty="0">
+              <a:solidFill>
+                <a:srgbClr val="000066"/>
+              </a:solidFill>
+              <a:latin typeface="微軟正黑體" pitchFamily="34" charset="-120"/>
+              <a:ea typeface="微軟正黑體" pitchFamily="34" charset="-120"/>
+            </a:endParaRPr>
+          </a:p>
+          <a:p>
+            <a:pPr algn="ctr">
+              <a:buNone/>
+            </a:pPr>
+            <a:r>
+              <a:rPr lang="zh-TW" altLang="en-US" sz="6400" b="1" dirty="0">
+                <a:solidFill>
+                  <a:srgbClr val="000066"/>
+                </a:solidFill>
+                <a:latin typeface="微軟正黑體" pitchFamily="34" charset="-120"/>
+                <a:ea typeface="微軟正黑體" pitchFamily="34" charset="-120"/>
+              </a:rPr>
+              <a:t>祂張開雙手  我們就得飽足</a:t>
+            </a:r>
+          </a:p>
+        </p:txBody>
+      </p:sp>
+      <p:sp>
+        <p:nvSpPr>
+          <p:cNvPr id="3" name="TextBox 2"/>
+          <p:cNvSpPr txBox="1"/>
+          <p:nvPr/>
+        </p:nvSpPr>
+        <p:spPr>
+          <a:xfrm>
+            <a:off x="0" y="5157193"/>
+            <a:ext cx="12192000" cy="584775"/>
+          </a:xfrm>
+          <a:prstGeom prst="rect">
+            <a:avLst/>
+          </a:prstGeom>
+          <a:noFill/>
+        </p:spPr>
+        <p:txBody>
+          <a:bodyPr wrap="square" rtlCol="0">
+            <a:spAutoFit/>
+          </a:bodyPr>
+          <a:lstStyle/>
+          <a:p>
+            <a:pPr algn="ctr"/>
+            <a:r>
+              <a:rPr lang="en-US" sz="3200" b="1" dirty="0">
+                <a:solidFill>
+                  <a:srgbClr val="000066"/>
+                </a:solidFill>
+                <a:latin typeface="Microsoft JhengHei" panose="020B0604030504040204" pitchFamily="34" charset="-120"/>
+                <a:ea typeface="Microsoft JhengHei" panose="020B0604030504040204" pitchFamily="34" charset="-120"/>
+              </a:rPr>
+              <a:t>( </a:t>
+            </a:r>
+            <a:r>
+              <a:rPr lang="zh-CN" altLang="en-US" sz="3200" b="1" dirty="0">
+                <a:solidFill>
+                  <a:srgbClr val="000066"/>
+                </a:solidFill>
+                <a:latin typeface="Microsoft JhengHei" panose="020B0604030504040204" pitchFamily="34" charset="-120"/>
+                <a:ea typeface="Microsoft JhengHei" panose="020B0604030504040204" pitchFamily="34" charset="-120"/>
+              </a:rPr>
+              <a:t>正歌 </a:t>
+            </a:r>
+            <a:r>
+              <a:rPr lang="en-US" altLang="zh-CN" sz="3200" b="1" dirty="0">
+                <a:solidFill>
+                  <a:srgbClr val="000066"/>
+                </a:solidFill>
+                <a:latin typeface="Microsoft JhengHei" panose="020B0604030504040204" pitchFamily="34" charset="-120"/>
+                <a:ea typeface="Microsoft JhengHei" panose="020B0604030504040204" pitchFamily="34" charset="-120"/>
+              </a:rPr>
+              <a:t>2</a:t>
+            </a:r>
+            <a:r>
+              <a:rPr lang="en-US" sz="3200" b="1" dirty="0">
+                <a:solidFill>
+                  <a:srgbClr val="000066"/>
+                </a:solidFill>
+                <a:latin typeface="Microsoft JhengHei" panose="020B0604030504040204" pitchFamily="34" charset="-120"/>
+                <a:ea typeface="Microsoft JhengHei" panose="020B0604030504040204" pitchFamily="34" charset="-120"/>
+              </a:rPr>
+              <a:t> )</a:t>
+            </a:r>
+            <a:endParaRPr lang="vi-VN" sz="3200" b="1" dirty="0">
+              <a:solidFill>
+                <a:srgbClr val="000066"/>
+              </a:solidFill>
+              <a:ea typeface="Microsoft JhengHei" panose="020B0604030504040204" pitchFamily="34" charset="-120"/>
+            </a:endParaRPr>
+          </a:p>
+        </p:txBody>
+      </p:sp>
+    </p:spTree>
+    <p:extLst>
+      <p:ext uri="{BB962C8B-B14F-4D97-AF65-F5344CB8AC3E}">
+        <p14:creationId xmlns:p14="http://schemas.microsoft.com/office/powerpoint/2010/main" val="1281664243"/>
+      </p:ext>
+    </p:extLst>
   </p:cSld>
   <p:clrMapOvr>
     <a:masterClrMapping/>
